--- a/outputs/full_deck/deck.pptx
+++ b/outputs/full_deck/deck.pptx
@@ -25,6 +25,7 @@
     <p:sldId id="358" r:id="rId23"/>
     <p:sldId id="359" r:id="rId24"/>
     <p:sldId id="360" r:id="rId25"/>
+    <p:sldId id="361" r:id="rId26"/>
   </p:sldIdLst>
   <p:sldSz cx="12192000" cy="6858000"/>
   <p:notesSz cx="6858000" cy="9144000"/>
@@ -5750,8 +5751,17 @@
           <a:lstStyle/>
           <a:p>
             <a:r>
+              <a:rPr sz="3200" b="1">
+                <a:solidFill>
+                  <a:srgbClr val="4D4D4D"/>
+                </a:solidFill>
+                <a:latin typeface="微軟正黑體"/>
+                <a:ea typeface="微軟正黑體"/>
+                <a:cs typeface="微軟正黑體"/>
+              </a:rPr>
               <a:t>信用卡市場分析與經營洞察</a:t>
             </a:r>
+            <a:endParaRPr lang="zh-TW" altLang="en-US"/>
           </a:p>
         </p:txBody>
       </p:sp>
@@ -5794,8 +5804,73 @@
           <a:lstStyle/>
           <a:p>
             <a:r>
+              <a:rPr sz="1400" b="0">
+                <a:solidFill>
+                  <a:srgbClr val="C12026"/>
+                </a:solidFill>
+                <a:latin typeface="微軟正黑體"/>
+                <a:ea typeface="微軟正黑體"/>
+                <a:cs typeface="微軟正黑體"/>
+              </a:rPr>
+              <a:t>CHAPTER 04</a:t>
+            </a:r>
+          </a:p>
+          <a:p>
+            <a:r>
+              <a:rPr sz="3200" b="1">
+                <a:solidFill>
+                  <a:srgbClr val="4D4D4D"/>
+                </a:solidFill>
+                <a:latin typeface="微軟正黑體"/>
+                <a:ea typeface="微軟正黑體"/>
+                <a:cs typeface="微軟正黑體"/>
+              </a:rPr>
               <a:t>客戶活躍度</a:t>
             </a:r>
+          </a:p>
+        </p:txBody>
+      </p:sp>
+      <p:sp>
+        <p:nvSpPr>
+          <p:cNvPr id="3" name="Rectangle 2"/>
+          <p:cNvSpPr/>
+          <p:nvPr/>
+        </p:nvSpPr>
+        <p:spPr>
+          <a:xfrm>
+            <a:off x="831851" y="5737075"/>
+            <a:ext cx="1905000" cy="28575"/>
+          </a:xfrm>
+          <a:prstGeom prst="rect">
+            <a:avLst/>
+          </a:prstGeom>
+          <a:solidFill>
+            <a:srgbClr val="C12026"/>
+          </a:solidFill>
+          <a:ln>
+            <a:noFill/>
+          </a:ln>
+          <a:effectLst/>
+        </p:spPr>
+        <p:style>
+          <a:lnRef idx="1">
+            <a:schemeClr val="accent1"/>
+          </a:lnRef>
+          <a:fillRef idx="3">
+            <a:schemeClr val="accent1"/>
+          </a:fillRef>
+          <a:effectRef idx="2">
+            <a:schemeClr val="accent1"/>
+          </a:effectRef>
+          <a:fontRef idx="minor">
+            <a:schemeClr val="lt1"/>
+          </a:fontRef>
+        </p:style>
+        <p:txBody>
+          <a:bodyPr rtlCol="0" anchor="ctr"/>
+          <a:lstStyle/>
+          <a:p>
+            <a:pPr algn="ctr"/>
           </a:p>
         </p:txBody>
       </p:sp>
@@ -5829,32 +5904,200 @@
         </p:nvSpPr>
         <p:spPr>
           <a:xfrm>
-            <a:off x="7205535" y="1247553"/>
-            <a:ext cx="4405560" cy="4880100"/>
+            <a:off x="7205535" y="1854753"/>
+            <a:ext cx="4405560" cy="4272900"/>
           </a:xfrm>
         </p:spPr>
         <p:txBody>
-          <a:bodyPr wrap="square"/>
+          <a:bodyPr wrap="square">
+            <a:normAutofit/>
+          </a:bodyPr>
           <a:lstStyle/>
           <a:p>
-            <a:pPr/>
-            <a:r>
-              <a:rPr b="1" sz="1600"/>
-              <a:t>有效卡數 Top 10呈現明顯的業者集中態勢</a:t>
+            <a:pPr>
+              <a:spcAft>
+                <a:spcPts val="800"/>
+              </a:spcAft>
+            </a:pPr>
+            <a:r>
+              <a:rPr sz="1100" b="1">
+                <a:solidFill>
+                  <a:srgbClr val="C12026"/>
+                </a:solidFill>
+                <a:latin typeface="微軟正黑體"/>
+                <a:ea typeface="微軟正黑體"/>
+                <a:cs typeface="微軟正黑體"/>
+              </a:rPr>
+              <a:t>▸ </a:t>
+            </a:r>
+            <a:r>
+              <a:rPr sz="1100" b="0">
+                <a:solidFill>
+                  <a:srgbClr val="4D4D4D"/>
+                </a:solidFill>
+                <a:latin typeface="微軟正黑體"/>
+                <a:ea typeface="微軟正黑體"/>
+                <a:cs typeface="微軟正黑體"/>
+              </a:rPr>
+              <a:t>領先者 </a:t>
+            </a:r>
+            <a:r>
+              <a:rPr sz="1100" b="1">
+                <a:solidFill>
+                  <a:srgbClr val="1A1A1A"/>
+                </a:solidFill>
+                <a:highlight>
+                  <a:srgbClr val="FFFF00"/>
+                </a:highlight>
+                <a:latin typeface="微軟正黑體"/>
+                <a:ea typeface="微軟正黑體"/>
+                <a:cs typeface="微軟正黑體"/>
+              </a:rPr>
+              <a:t>中國信託商業銀行</a:t>
+            </a:r>
+            <a:r>
+              <a:rPr sz="1100" b="0">
+                <a:solidFill>
+                  <a:srgbClr val="4D4D4D"/>
+                </a:solidFill>
+                <a:latin typeface="微軟正黑體"/>
+                <a:ea typeface="微軟正黑體"/>
+                <a:cs typeface="微軟正黑體"/>
+              </a:rPr>
+              <a:t> 達 </a:t>
+            </a:r>
+            <a:r>
+              <a:rPr sz="1100" b="1">
+                <a:solidFill>
+                  <a:srgbClr val="1A1A1A"/>
+                </a:solidFill>
+                <a:highlight>
+                  <a:srgbClr val="FFFF00"/>
+                </a:highlight>
+                <a:latin typeface="微軟正黑體"/>
+                <a:ea typeface="微軟正黑體"/>
+                <a:cs typeface="微軟正黑體"/>
+              </a:rPr>
+              <a:t>6,685,860</a:t>
+            </a:r>
+            <a:r>
+              <a:rPr sz="1100" b="0">
+                <a:solidFill>
+                  <a:srgbClr val="4D4D4D"/>
+                </a:solidFill>
+                <a:latin typeface="微軟正黑體"/>
+                <a:ea typeface="微軟正黑體"/>
+                <a:cs typeface="微軟正黑體"/>
+              </a:rPr>
+              <a:t>，明顯拉開與其餘業者的距離，反映規模效應仍在累積</a:t>
             </a:r>
           </a:p>
           <a:p>
-            <a:pPr lvl="1"/>
-            <a:r>
-              <a:rPr sz="1200"/>
-              <a:t>領先者 中國信託商業銀行 達 6,685,860</a:t>
+            <a:pPr>
+              <a:spcAft>
+                <a:spcPts val="800"/>
+              </a:spcAft>
+            </a:pPr>
+            <a:r>
+              <a:rPr sz="1100" b="1">
+                <a:solidFill>
+                  <a:srgbClr val="C12026"/>
+                </a:solidFill>
+                <a:latin typeface="微軟正黑體"/>
+                <a:ea typeface="微軟正黑體"/>
+                <a:cs typeface="微軟正黑體"/>
+              </a:rPr>
+              <a:t>▸ </a:t>
+            </a:r>
+            <a:r>
+              <a:rPr sz="1100" b="0">
+                <a:solidFill>
+                  <a:srgbClr val="4D4D4D"/>
+                </a:solidFill>
+                <a:latin typeface="微軟正黑體"/>
+                <a:ea typeface="微軟正黑體"/>
+                <a:cs typeface="微軟正黑體"/>
+              </a:rPr>
+              <a:t>末位業者僅 </a:t>
+            </a:r>
+            <a:r>
+              <a:rPr sz="1100" b="1">
+                <a:solidFill>
+                  <a:srgbClr val="1A1A1A"/>
+                </a:solidFill>
+                <a:highlight>
+                  <a:srgbClr val="FFFF00"/>
+                </a:highlight>
+                <a:latin typeface="微軟正黑體"/>
+                <a:ea typeface="微軟正黑體"/>
+                <a:cs typeface="微軟正黑體"/>
+              </a:rPr>
+              <a:t>910,122</a:t>
+            </a:r>
+            <a:r>
+              <a:rPr sz="1100" b="0">
+                <a:solidFill>
+                  <a:srgbClr val="4D4D4D"/>
+                </a:solidFill>
+                <a:latin typeface="微軟正黑體"/>
+                <a:ea typeface="微軟正黑體"/>
+                <a:cs typeface="微軟正黑體"/>
+              </a:rPr>
+              <a:t>，與領先者之間的落差顯示中小型業者在此指標上缺乏可持續的規模優勢</a:t>
             </a:r>
           </a:p>
           <a:p>
-            <a:pPr lvl="1"/>
-            <a:r>
-              <a:rPr sz="1200"/>
-              <a:t>末位者僅 910,122</a:t>
+            <a:pPr>
+              <a:spcAft>
+                <a:spcPts val="800"/>
+              </a:spcAft>
+            </a:pPr>
+            <a:r>
+              <a:rPr sz="1100" b="1">
+                <a:solidFill>
+                  <a:srgbClr val="C12026"/>
+                </a:solidFill>
+                <a:latin typeface="微軟正黑體"/>
+                <a:ea typeface="微軟正黑體"/>
+                <a:cs typeface="微軟正黑體"/>
+              </a:rPr>
+              <a:t>▸ </a:t>
+            </a:r>
+            <a:r>
+              <a:rPr sz="1100" b="0">
+                <a:solidFill>
+                  <a:srgbClr val="4D4D4D"/>
+                </a:solidFill>
+                <a:latin typeface="微軟正黑體"/>
+                <a:ea typeface="微軟正黑體"/>
+                <a:cs typeface="微軟正黑體"/>
+              </a:rPr>
+              <a:t>全體平均為 </a:t>
+            </a:r>
+            <a:r>
+              <a:rPr sz="1100" b="1">
+                <a:solidFill>
+                  <a:srgbClr val="1A1A1A"/>
+                </a:solidFill>
+                <a:highlight>
+                  <a:srgbClr val="FFFF00"/>
+                </a:highlight>
+                <a:latin typeface="微軟正黑體"/>
+                <a:ea typeface="微軟正黑體"/>
+                <a:cs typeface="微軟正黑體"/>
+              </a:rPr>
+              <a:t>3,528,341.8</a:t>
+            </a:r>
+            <a:r>
+              <a:rPr sz="1100" b="0">
+                <a:solidFill>
+                  <a:srgbClr val="4D4D4D"/>
+                </a:solidFill>
+                <a:latin typeface="微軟正黑體"/>
+                <a:ea typeface="微軟正黑體"/>
+                <a:cs typeface="微軟正黑體"/>
+              </a:rPr>
+              <a:t>，位於平均之下的業者需重新檢視資源配置是否與市場競爭強度相稱</a:t>
             </a:r>
           </a:p>
         </p:txBody>
@@ -5874,23 +6117,142 @@
           <a:bodyPr/>
           <a:lstStyle/>
           <a:p>
-            <a:r>
+            <a:pPr algn="l"/>
+            <a:r>
+              <a:rPr sz="2200" b="0">
+                <a:solidFill>
+                  <a:srgbClr val="1A1A1A"/>
+                </a:solidFill>
+                <a:latin typeface="微軟正黑體"/>
+                <a:ea typeface="微軟正黑體"/>
+                <a:cs typeface="微軟正黑體"/>
+              </a:rPr>
               <a:t>有效卡數表現</a:t>
+            </a:r>
+          </a:p>
+        </p:txBody>
+      </p:sp>
+      <p:sp>
+        <p:nvSpPr>
+          <p:cNvPr id="4" name="Rectangle 3"/>
+          <p:cNvSpPr/>
+          <p:nvPr/>
+        </p:nvSpPr>
+        <p:spPr>
+          <a:xfrm>
+            <a:off x="368595" y="1247553"/>
+            <a:ext cx="57150" cy="457200"/>
+          </a:xfrm>
+          <a:prstGeom prst="rect">
+            <a:avLst/>
+          </a:prstGeom>
+          <a:solidFill>
+            <a:srgbClr val="FFC000"/>
+          </a:solidFill>
+          <a:ln>
+            <a:noFill/>
+          </a:ln>
+          <a:effectLst/>
+        </p:spPr>
+        <p:style>
+          <a:lnRef idx="1">
+            <a:schemeClr val="accent1"/>
+          </a:lnRef>
+          <a:fillRef idx="3">
+            <a:schemeClr val="accent1"/>
+          </a:fillRef>
+          <a:effectRef idx="2">
+            <a:schemeClr val="accent1"/>
+          </a:effectRef>
+          <a:fontRef idx="minor">
+            <a:schemeClr val="lt1"/>
+          </a:fontRef>
+        </p:style>
+        <p:txBody>
+          <a:bodyPr rtlCol="0" anchor="ctr"/>
+          <a:lstStyle/>
+          <a:p>
+            <a:pPr algn="ctr"/>
+          </a:p>
+        </p:txBody>
+      </p:sp>
+      <p:sp>
+        <p:nvSpPr>
+          <p:cNvPr id="5" name="Rectangle 4"/>
+          <p:cNvSpPr/>
+          <p:nvPr/>
+        </p:nvSpPr>
+        <p:spPr>
+          <a:xfrm>
+            <a:off x="425745" y="1247553"/>
+            <a:ext cx="11185350" cy="457200"/>
+          </a:xfrm>
+          <a:prstGeom prst="rect">
+            <a:avLst/>
+          </a:prstGeom>
+          <a:solidFill>
+            <a:srgbClr val="FFF8D6"/>
+          </a:solidFill>
+          <a:ln>
+            <a:noFill/>
+          </a:ln>
+          <a:effectLst/>
+        </p:spPr>
+        <p:style>
+          <a:lnRef idx="1">
+            <a:schemeClr val="accent1"/>
+          </a:lnRef>
+          <a:fillRef idx="3">
+            <a:schemeClr val="accent1"/>
+          </a:fillRef>
+          <a:effectRef idx="2">
+            <a:schemeClr val="accent1"/>
+          </a:effectRef>
+          <a:fontRef idx="minor">
+            <a:schemeClr val="lt1"/>
+          </a:fontRef>
+        </p:style>
+        <p:txBody>
+          <a:bodyPr rtlCol="0" anchor="ctr" wrap="square" lIns="175260"/>
+          <a:lstStyle/>
+          <a:p>
+            <a:pPr algn="l"/>
+            <a:r>
+              <a:rPr sz="1300" b="1">
+                <a:solidFill>
+                  <a:srgbClr val="C12026"/>
+                </a:solidFill>
+                <a:latin typeface="微軟正黑體"/>
+                <a:ea typeface="微軟正黑體"/>
+                <a:cs typeface="微軟正黑體"/>
+              </a:rPr>
+              <a:t>◆ </a:t>
+            </a:r>
+            <a:r>
+              <a:rPr sz="1300" b="1">
+                <a:solidFill>
+                  <a:srgbClr val="1A1A1A"/>
+                </a:solidFill>
+                <a:latin typeface="微軟正黑體"/>
+                <a:ea typeface="微軟正黑體"/>
+                <a:cs typeface="微軟正黑體"/>
+              </a:rPr>
+              <a:t>有效卡數 Top 10呈現明顯的業者集中態勢，規模差距短期內難以收斂</a:t>
             </a:r>
           </a:p>
         </p:txBody>
       </p:sp>
       <p:graphicFrame>
         <p:nvGraphicFramePr>
-          <p:cNvPr id="4" name="Chart 3"/>
+          <p:cNvPr id="6" name="Chart 5"/>
           <p:cNvGraphicFramePr>
             <a:graphicFrameLocks noGrp="1"/>
           </p:cNvGraphicFramePr>
           <p:nvPr/>
         </p:nvGraphicFramePr>
         <p:xfrm>
-          <a:off x="368595" y="1247553"/>
-          <a:ext cx="6608340" cy="4880100"/>
+          <a:off x="368595" y="1854753"/>
+          <a:ext cx="6608340" cy="4272900"/>
         </p:xfrm>
         <a:graphic>
           <a:graphicData uri="http://schemas.openxmlformats.org/drawingml/2006/chart">
@@ -5898,6 +6260,42 @@
           </a:graphicData>
         </a:graphic>
       </p:graphicFrame>
+      <p:sp>
+        <p:nvSpPr>
+          <p:cNvPr id="7" name="TextBox 6"/>
+          <p:cNvSpPr txBox="1"/>
+          <p:nvPr/>
+        </p:nvSpPr>
+        <p:spPr>
+          <a:xfrm>
+            <a:off x="368595" y="6150000"/>
+            <a:ext cx="11242500" cy="250000"/>
+          </a:xfrm>
+          <a:prstGeom prst="rect">
+            <a:avLst/>
+          </a:prstGeom>
+          <a:noFill/>
+        </p:spPr>
+        <p:txBody>
+          <a:bodyPr wrap="none">
+            <a:spAutoFit/>
+          </a:bodyPr>
+          <a:lstStyle/>
+          <a:p>
+            <a:r>
+              <a:rPr sz="1000" b="0">
+                <a:solidFill>
+                  <a:srgbClr val="666666"/>
+                </a:solidFill>
+                <a:latin typeface="微軟正黑體"/>
+                <a:ea typeface="微軟正黑體"/>
+                <a:cs typeface="微軟正黑體"/>
+              </a:rPr>
+              <a:t>可點選圖表右鍵「編輯資料」查看原始 EXCEL 資料表</a:t>
+            </a:r>
+          </a:p>
+        </p:txBody>
+      </p:sp>
     </p:spTree>
   </p:cSld>
   <p:clrMapOvr>
@@ -5932,8 +6330,73 @@
           <a:lstStyle/>
           <a:p>
             <a:r>
+              <a:rPr sz="1400" b="0">
+                <a:solidFill>
+                  <a:srgbClr val="C12026"/>
+                </a:solidFill>
+                <a:latin typeface="微軟正黑體"/>
+                <a:ea typeface="微軟正黑體"/>
+                <a:cs typeface="微軟正黑體"/>
+              </a:rPr>
+              <a:t>CHAPTER 05</a:t>
+            </a:r>
+          </a:p>
+          <a:p>
+            <a:r>
+              <a:rPr sz="3200" b="1">
+                <a:solidFill>
+                  <a:srgbClr val="4D4D4D"/>
+                </a:solidFill>
+                <a:latin typeface="微軟正黑體"/>
+                <a:ea typeface="微軟正黑體"/>
+                <a:cs typeface="微軟正黑體"/>
+              </a:rPr>
               <a:t>獲利能力</a:t>
             </a:r>
+          </a:p>
+        </p:txBody>
+      </p:sp>
+      <p:sp>
+        <p:nvSpPr>
+          <p:cNvPr id="3" name="Rectangle 2"/>
+          <p:cNvSpPr/>
+          <p:nvPr/>
+        </p:nvSpPr>
+        <p:spPr>
+          <a:xfrm>
+            <a:off x="831851" y="5737075"/>
+            <a:ext cx="1905000" cy="28575"/>
+          </a:xfrm>
+          <a:prstGeom prst="rect">
+            <a:avLst/>
+          </a:prstGeom>
+          <a:solidFill>
+            <a:srgbClr val="C12026"/>
+          </a:solidFill>
+          <a:ln>
+            <a:noFill/>
+          </a:ln>
+          <a:effectLst/>
+        </p:spPr>
+        <p:style>
+          <a:lnRef idx="1">
+            <a:schemeClr val="accent1"/>
+          </a:lnRef>
+          <a:fillRef idx="3">
+            <a:schemeClr val="accent1"/>
+          </a:fillRef>
+          <a:effectRef idx="2">
+            <a:schemeClr val="accent1"/>
+          </a:effectRef>
+          <a:fontRef idx="minor">
+            <a:schemeClr val="lt1"/>
+          </a:fontRef>
+        </p:style>
+        <p:txBody>
+          <a:bodyPr rtlCol="0" anchor="ctr"/>
+          <a:lstStyle/>
+          <a:p>
+            <a:pPr algn="ctr"/>
           </a:p>
         </p:txBody>
       </p:sp>
@@ -5967,32 +6430,200 @@
         </p:nvSpPr>
         <p:spPr>
           <a:xfrm>
-            <a:off x="7205535" y="1247553"/>
-            <a:ext cx="4405560" cy="4880100"/>
+            <a:off x="7205535" y="1854753"/>
+            <a:ext cx="4405560" cy="4272900"/>
           </a:xfrm>
         </p:spPr>
         <p:txBody>
-          <a:bodyPr wrap="square"/>
+          <a:bodyPr wrap="square">
+            <a:normAutofit/>
+          </a:bodyPr>
           <a:lstStyle/>
           <a:p>
-            <a:pPr/>
-            <a:r>
-              <a:rPr b="1" sz="1600"/>
-              <a:t>未到期分期付款餘額 Top 10呈現明顯的業者集中態勢</a:t>
+            <a:pPr>
+              <a:spcAft>
+                <a:spcPts val="800"/>
+              </a:spcAft>
+            </a:pPr>
+            <a:r>
+              <a:rPr sz="1100" b="1">
+                <a:solidFill>
+                  <a:srgbClr val="C12026"/>
+                </a:solidFill>
+                <a:latin typeface="微軟正黑體"/>
+                <a:ea typeface="微軟正黑體"/>
+                <a:cs typeface="微軟正黑體"/>
+              </a:rPr>
+              <a:t>▸ </a:t>
+            </a:r>
+            <a:r>
+              <a:rPr sz="1100" b="0">
+                <a:solidFill>
+                  <a:srgbClr val="4D4D4D"/>
+                </a:solidFill>
+                <a:latin typeface="微軟正黑體"/>
+                <a:ea typeface="微軟正黑體"/>
+                <a:cs typeface="微軟正黑體"/>
+              </a:rPr>
+              <a:t>領先者 </a:t>
+            </a:r>
+            <a:r>
+              <a:rPr sz="1100" b="1">
+                <a:solidFill>
+                  <a:srgbClr val="1A1A1A"/>
+                </a:solidFill>
+                <a:highlight>
+                  <a:srgbClr val="FFFF00"/>
+                </a:highlight>
+                <a:latin typeface="微軟正黑體"/>
+                <a:ea typeface="微軟正黑體"/>
+                <a:cs typeface="微軟正黑體"/>
+              </a:rPr>
+              <a:t>台北富邦商業銀行</a:t>
+            </a:r>
+            <a:r>
+              <a:rPr sz="1100" b="0">
+                <a:solidFill>
+                  <a:srgbClr val="4D4D4D"/>
+                </a:solidFill>
+                <a:latin typeface="微軟正黑體"/>
+                <a:ea typeface="微軟正黑體"/>
+                <a:cs typeface="微軟正黑體"/>
+              </a:rPr>
+              <a:t> 達 </a:t>
+            </a:r>
+            <a:r>
+              <a:rPr sz="1100" b="1">
+                <a:solidFill>
+                  <a:srgbClr val="1A1A1A"/>
+                </a:solidFill>
+                <a:highlight>
+                  <a:srgbClr val="FFFF00"/>
+                </a:highlight>
+                <a:latin typeface="微軟正黑體"/>
+                <a:ea typeface="微軟正黑體"/>
+                <a:cs typeface="微軟正黑體"/>
+              </a:rPr>
+              <a:t>32,786,476</a:t>
+            </a:r>
+            <a:r>
+              <a:rPr sz="1100" b="0">
+                <a:solidFill>
+                  <a:srgbClr val="4D4D4D"/>
+                </a:solidFill>
+                <a:latin typeface="微軟正黑體"/>
+                <a:ea typeface="微軟正黑體"/>
+                <a:cs typeface="微軟正黑體"/>
+              </a:rPr>
+              <a:t>，明顯拉開與其餘業者的距離，反映規模效應仍在累積</a:t>
             </a:r>
           </a:p>
           <a:p>
-            <a:pPr lvl="1"/>
-            <a:r>
-              <a:rPr sz="1200"/>
-              <a:t>領先者 台北富邦商業銀行 達 32,786,476</a:t>
+            <a:pPr>
+              <a:spcAft>
+                <a:spcPts val="800"/>
+              </a:spcAft>
+            </a:pPr>
+            <a:r>
+              <a:rPr sz="1100" b="1">
+                <a:solidFill>
+                  <a:srgbClr val="C12026"/>
+                </a:solidFill>
+                <a:latin typeface="微軟正黑體"/>
+                <a:ea typeface="微軟正黑體"/>
+                <a:cs typeface="微軟正黑體"/>
+              </a:rPr>
+              <a:t>▸ </a:t>
+            </a:r>
+            <a:r>
+              <a:rPr sz="1100" b="0">
+                <a:solidFill>
+                  <a:srgbClr val="4D4D4D"/>
+                </a:solidFill>
+                <a:latin typeface="微軟正黑體"/>
+                <a:ea typeface="微軟正黑體"/>
+                <a:cs typeface="微軟正黑體"/>
+              </a:rPr>
+              <a:t>末位業者僅 </a:t>
+            </a:r>
+            <a:r>
+              <a:rPr sz="1100" b="1">
+                <a:solidFill>
+                  <a:srgbClr val="1A1A1A"/>
+                </a:solidFill>
+                <a:highlight>
+                  <a:srgbClr val="FFFF00"/>
+                </a:highlight>
+                <a:latin typeface="微軟正黑體"/>
+                <a:ea typeface="微軟正黑體"/>
+                <a:cs typeface="微軟正黑體"/>
+              </a:rPr>
+              <a:t>4,132,981</a:t>
+            </a:r>
+            <a:r>
+              <a:rPr sz="1100" b="0">
+                <a:solidFill>
+                  <a:srgbClr val="4D4D4D"/>
+                </a:solidFill>
+                <a:latin typeface="微軟正黑體"/>
+                <a:ea typeface="微軟正黑體"/>
+                <a:cs typeface="微軟正黑體"/>
+              </a:rPr>
+              <a:t>，與領先者之間的落差顯示中小型業者在此指標上缺乏可持續的規模優勢</a:t>
             </a:r>
           </a:p>
           <a:p>
-            <a:pPr lvl="1"/>
-            <a:r>
-              <a:rPr sz="1200"/>
-              <a:t>末位者僅 4,132,981</a:t>
+            <a:pPr>
+              <a:spcAft>
+                <a:spcPts val="800"/>
+              </a:spcAft>
+            </a:pPr>
+            <a:r>
+              <a:rPr sz="1100" b="1">
+                <a:solidFill>
+                  <a:srgbClr val="C12026"/>
+                </a:solidFill>
+                <a:latin typeface="微軟正黑體"/>
+                <a:ea typeface="微軟正黑體"/>
+                <a:cs typeface="微軟正黑體"/>
+              </a:rPr>
+              <a:t>▸ </a:t>
+            </a:r>
+            <a:r>
+              <a:rPr sz="1100" b="0">
+                <a:solidFill>
+                  <a:srgbClr val="4D4D4D"/>
+                </a:solidFill>
+                <a:latin typeface="微軟正黑體"/>
+                <a:ea typeface="微軟正黑體"/>
+                <a:cs typeface="微軟正黑體"/>
+              </a:rPr>
+              <a:t>全體平均為 </a:t>
+            </a:r>
+            <a:r>
+              <a:rPr sz="1100" b="1">
+                <a:solidFill>
+                  <a:srgbClr val="1A1A1A"/>
+                </a:solidFill>
+                <a:highlight>
+                  <a:srgbClr val="FFFF00"/>
+                </a:highlight>
+                <a:latin typeface="微軟正黑體"/>
+                <a:ea typeface="微軟正黑體"/>
+                <a:cs typeface="微軟正黑體"/>
+              </a:rPr>
+              <a:t>16,708,456.7</a:t>
+            </a:r>
+            <a:r>
+              <a:rPr sz="1100" b="0">
+                <a:solidFill>
+                  <a:srgbClr val="4D4D4D"/>
+                </a:solidFill>
+                <a:latin typeface="微軟正黑體"/>
+                <a:ea typeface="微軟正黑體"/>
+                <a:cs typeface="微軟正黑體"/>
+              </a:rPr>
+              <a:t>，位於平均之下的業者需重新檢視資源配置是否與市場競爭強度相稱</a:t>
             </a:r>
           </a:p>
         </p:txBody>
@@ -6012,23 +6643,142 @@
           <a:bodyPr/>
           <a:lstStyle/>
           <a:p>
-            <a:r>
+            <a:pPr algn="l"/>
+            <a:r>
+              <a:rPr sz="2200" b="0">
+                <a:solidFill>
+                  <a:srgbClr val="1A1A1A"/>
+                </a:solidFill>
+                <a:latin typeface="微軟正黑體"/>
+                <a:ea typeface="微軟正黑體"/>
+                <a:cs typeface="微軟正黑體"/>
+              </a:rPr>
               <a:t>循環信用與分期貢獻</a:t>
+            </a:r>
+          </a:p>
+        </p:txBody>
+      </p:sp>
+      <p:sp>
+        <p:nvSpPr>
+          <p:cNvPr id="4" name="Rectangle 3"/>
+          <p:cNvSpPr/>
+          <p:nvPr/>
+        </p:nvSpPr>
+        <p:spPr>
+          <a:xfrm>
+            <a:off x="368595" y="1247553"/>
+            <a:ext cx="57150" cy="457200"/>
+          </a:xfrm>
+          <a:prstGeom prst="rect">
+            <a:avLst/>
+          </a:prstGeom>
+          <a:solidFill>
+            <a:srgbClr val="FFC000"/>
+          </a:solidFill>
+          <a:ln>
+            <a:noFill/>
+          </a:ln>
+          <a:effectLst/>
+        </p:spPr>
+        <p:style>
+          <a:lnRef idx="1">
+            <a:schemeClr val="accent1"/>
+          </a:lnRef>
+          <a:fillRef idx="3">
+            <a:schemeClr val="accent1"/>
+          </a:fillRef>
+          <a:effectRef idx="2">
+            <a:schemeClr val="accent1"/>
+          </a:effectRef>
+          <a:fontRef idx="minor">
+            <a:schemeClr val="lt1"/>
+          </a:fontRef>
+        </p:style>
+        <p:txBody>
+          <a:bodyPr rtlCol="0" anchor="ctr"/>
+          <a:lstStyle/>
+          <a:p>
+            <a:pPr algn="ctr"/>
+          </a:p>
+        </p:txBody>
+      </p:sp>
+      <p:sp>
+        <p:nvSpPr>
+          <p:cNvPr id="5" name="Rectangle 4"/>
+          <p:cNvSpPr/>
+          <p:nvPr/>
+        </p:nvSpPr>
+        <p:spPr>
+          <a:xfrm>
+            <a:off x="425745" y="1247553"/>
+            <a:ext cx="11185350" cy="457200"/>
+          </a:xfrm>
+          <a:prstGeom prst="rect">
+            <a:avLst/>
+          </a:prstGeom>
+          <a:solidFill>
+            <a:srgbClr val="FFF8D6"/>
+          </a:solidFill>
+          <a:ln>
+            <a:noFill/>
+          </a:ln>
+          <a:effectLst/>
+        </p:spPr>
+        <p:style>
+          <a:lnRef idx="1">
+            <a:schemeClr val="accent1"/>
+          </a:lnRef>
+          <a:fillRef idx="3">
+            <a:schemeClr val="accent1"/>
+          </a:fillRef>
+          <a:effectRef idx="2">
+            <a:schemeClr val="accent1"/>
+          </a:effectRef>
+          <a:fontRef idx="minor">
+            <a:schemeClr val="lt1"/>
+          </a:fontRef>
+        </p:style>
+        <p:txBody>
+          <a:bodyPr rtlCol="0" anchor="ctr" wrap="square" lIns="175260"/>
+          <a:lstStyle/>
+          <a:p>
+            <a:pPr algn="l"/>
+            <a:r>
+              <a:rPr sz="1300" b="1">
+                <a:solidFill>
+                  <a:srgbClr val="C12026"/>
+                </a:solidFill>
+                <a:latin typeface="微軟正黑體"/>
+                <a:ea typeface="微軟正黑體"/>
+                <a:cs typeface="微軟正黑體"/>
+              </a:rPr>
+              <a:t>◆ </a:t>
+            </a:r>
+            <a:r>
+              <a:rPr sz="1300" b="1">
+                <a:solidFill>
+                  <a:srgbClr val="1A1A1A"/>
+                </a:solidFill>
+                <a:latin typeface="微軟正黑體"/>
+                <a:ea typeface="微軟正黑體"/>
+                <a:cs typeface="微軟正黑體"/>
+              </a:rPr>
+              <a:t>未到期分期付款餘額 Top 10呈現明顯的業者集中態勢，規模差距短期內難以收斂</a:t>
             </a:r>
           </a:p>
         </p:txBody>
       </p:sp>
       <p:graphicFrame>
         <p:nvGraphicFramePr>
-          <p:cNvPr id="4" name="Chart 3"/>
+          <p:cNvPr id="6" name="Chart 5"/>
           <p:cNvGraphicFramePr>
             <a:graphicFrameLocks noGrp="1"/>
           </p:cNvGraphicFramePr>
           <p:nvPr/>
         </p:nvGraphicFramePr>
         <p:xfrm>
-          <a:off x="368595" y="1247553"/>
-          <a:ext cx="6608340" cy="4880100"/>
+          <a:off x="368595" y="1854753"/>
+          <a:ext cx="6608340" cy="4272900"/>
         </p:xfrm>
         <a:graphic>
           <a:graphicData uri="http://schemas.openxmlformats.org/drawingml/2006/chart">
@@ -6036,6 +6786,42 @@
           </a:graphicData>
         </a:graphic>
       </p:graphicFrame>
+      <p:sp>
+        <p:nvSpPr>
+          <p:cNvPr id="7" name="TextBox 6"/>
+          <p:cNvSpPr txBox="1"/>
+          <p:nvPr/>
+        </p:nvSpPr>
+        <p:spPr>
+          <a:xfrm>
+            <a:off x="368595" y="6150000"/>
+            <a:ext cx="11242500" cy="250000"/>
+          </a:xfrm>
+          <a:prstGeom prst="rect">
+            <a:avLst/>
+          </a:prstGeom>
+          <a:noFill/>
+        </p:spPr>
+        <p:txBody>
+          <a:bodyPr wrap="none">
+            <a:spAutoFit/>
+          </a:bodyPr>
+          <a:lstStyle/>
+          <a:p>
+            <a:r>
+              <a:rPr sz="1000" b="0">
+                <a:solidFill>
+                  <a:srgbClr val="666666"/>
+                </a:solidFill>
+                <a:latin typeface="微軟正黑體"/>
+                <a:ea typeface="微軟正黑體"/>
+                <a:cs typeface="微軟正黑體"/>
+              </a:rPr>
+              <a:t>可點選圖表右鍵「編輯資料」查看原始 EXCEL 資料表</a:t>
+            </a:r>
+          </a:p>
+        </p:txBody>
+      </p:sp>
     </p:spTree>
   </p:cSld>
   <p:clrMapOvr>
@@ -6070,8 +6856,73 @@
           <a:lstStyle/>
           <a:p>
             <a:r>
+              <a:rPr sz="1400" b="0">
+                <a:solidFill>
+                  <a:srgbClr val="C12026"/>
+                </a:solidFill>
+                <a:latin typeface="微軟正黑體"/>
+                <a:ea typeface="微軟正黑體"/>
+                <a:cs typeface="微軟正黑體"/>
+              </a:rPr>
+              <a:t>CHAPTER 06</a:t>
+            </a:r>
+          </a:p>
+          <a:p>
+            <a:r>
+              <a:rPr sz="3200" b="1">
+                <a:solidFill>
+                  <a:srgbClr val="4D4D4D"/>
+                </a:solidFill>
+                <a:latin typeface="微軟正黑體"/>
+                <a:ea typeface="微軟正黑體"/>
+                <a:cs typeface="微軟正黑體"/>
+              </a:rPr>
               <a:t>風險與警訊</a:t>
             </a:r>
+          </a:p>
+        </p:txBody>
+      </p:sp>
+      <p:sp>
+        <p:nvSpPr>
+          <p:cNvPr id="3" name="Rectangle 2"/>
+          <p:cNvSpPr/>
+          <p:nvPr/>
+        </p:nvSpPr>
+        <p:spPr>
+          <a:xfrm>
+            <a:off x="831851" y="5737075"/>
+            <a:ext cx="1905000" cy="28575"/>
+          </a:xfrm>
+          <a:prstGeom prst="rect">
+            <a:avLst/>
+          </a:prstGeom>
+          <a:solidFill>
+            <a:srgbClr val="C12026"/>
+          </a:solidFill>
+          <a:ln>
+            <a:noFill/>
+          </a:ln>
+          <a:effectLst/>
+        </p:spPr>
+        <p:style>
+          <a:lnRef idx="1">
+            <a:schemeClr val="accent1"/>
+          </a:lnRef>
+          <a:fillRef idx="3">
+            <a:schemeClr val="accent1"/>
+          </a:fillRef>
+          <a:effectRef idx="2">
+            <a:schemeClr val="accent1"/>
+          </a:effectRef>
+          <a:fontRef idx="minor">
+            <a:schemeClr val="lt1"/>
+          </a:fontRef>
+        </p:style>
+        <p:txBody>
+          <a:bodyPr rtlCol="0" anchor="ctr"/>
+          <a:lstStyle/>
+          <a:p>
+            <a:pPr algn="ctr"/>
           </a:p>
         </p:txBody>
       </p:sp>
@@ -6105,32 +6956,200 @@
         </p:nvSpPr>
         <p:spPr>
           <a:xfrm>
-            <a:off x="7205535" y="1247553"/>
-            <a:ext cx="4405560" cy="4880100"/>
+            <a:off x="7205535" y="1854753"/>
+            <a:ext cx="4405560" cy="4272900"/>
           </a:xfrm>
         </p:spPr>
         <p:txBody>
-          <a:bodyPr wrap="square"/>
+          <a:bodyPr wrap="square">
+            <a:normAutofit/>
+          </a:bodyPr>
           <a:lstStyle/>
           <a:p>
-            <a:pPr/>
-            <a:r>
-              <a:rPr b="1" sz="1600"/>
-              <a:t>當月轉銷呆帳金額 Top 10呈現明顯的業者集中態勢</a:t>
+            <a:pPr>
+              <a:spcAft>
+                <a:spcPts val="800"/>
+              </a:spcAft>
+            </a:pPr>
+            <a:r>
+              <a:rPr sz="1100" b="1">
+                <a:solidFill>
+                  <a:srgbClr val="C12026"/>
+                </a:solidFill>
+                <a:latin typeface="微軟正黑體"/>
+                <a:ea typeface="微軟正黑體"/>
+                <a:cs typeface="微軟正黑體"/>
+              </a:rPr>
+              <a:t>▸ </a:t>
+            </a:r>
+            <a:r>
+              <a:rPr sz="1100" b="0">
+                <a:solidFill>
+                  <a:srgbClr val="4D4D4D"/>
+                </a:solidFill>
+                <a:latin typeface="微軟正黑體"/>
+                <a:ea typeface="微軟正黑體"/>
+                <a:cs typeface="微軟正黑體"/>
+              </a:rPr>
+              <a:t>領先者 </a:t>
+            </a:r>
+            <a:r>
+              <a:rPr sz="1100" b="1">
+                <a:solidFill>
+                  <a:srgbClr val="1A1A1A"/>
+                </a:solidFill>
+                <a:highlight>
+                  <a:srgbClr val="FFFF00"/>
+                </a:highlight>
+                <a:latin typeface="微軟正黑體"/>
+                <a:ea typeface="微軟正黑體"/>
+                <a:cs typeface="微軟正黑體"/>
+              </a:rPr>
+              <a:t>台北富邦商業銀行</a:t>
+            </a:r>
+            <a:r>
+              <a:rPr sz="1100" b="0">
+                <a:solidFill>
+                  <a:srgbClr val="4D4D4D"/>
+                </a:solidFill>
+                <a:latin typeface="微軟正黑體"/>
+                <a:ea typeface="微軟正黑體"/>
+                <a:cs typeface="微軟正黑體"/>
+              </a:rPr>
+              <a:t> 達 </a:t>
+            </a:r>
+            <a:r>
+              <a:rPr sz="1100" b="1">
+                <a:solidFill>
+                  <a:srgbClr val="1A1A1A"/>
+                </a:solidFill>
+                <a:highlight>
+                  <a:srgbClr val="FFFF00"/>
+                </a:highlight>
+                <a:latin typeface="微軟正黑體"/>
+                <a:ea typeface="微軟正黑體"/>
+                <a:cs typeface="微軟正黑體"/>
+              </a:rPr>
+              <a:t>95,338</a:t>
+            </a:r>
+            <a:r>
+              <a:rPr sz="1100" b="0">
+                <a:solidFill>
+                  <a:srgbClr val="4D4D4D"/>
+                </a:solidFill>
+                <a:latin typeface="微軟正黑體"/>
+                <a:ea typeface="微軟正黑體"/>
+                <a:cs typeface="微軟正黑體"/>
+              </a:rPr>
+              <a:t>，明顯拉開與其餘業者的距離，反映規模效應仍在累積</a:t>
             </a:r>
           </a:p>
           <a:p>
-            <a:pPr lvl="1"/>
-            <a:r>
-              <a:rPr sz="1200"/>
-              <a:t>領先者 台北富邦商業銀行 達 95,338</a:t>
+            <a:pPr>
+              <a:spcAft>
+                <a:spcPts val="800"/>
+              </a:spcAft>
+            </a:pPr>
+            <a:r>
+              <a:rPr sz="1100" b="1">
+                <a:solidFill>
+                  <a:srgbClr val="C12026"/>
+                </a:solidFill>
+                <a:latin typeface="微軟正黑體"/>
+                <a:ea typeface="微軟正黑體"/>
+                <a:cs typeface="微軟正黑體"/>
+              </a:rPr>
+              <a:t>▸ </a:t>
+            </a:r>
+            <a:r>
+              <a:rPr sz="1100" b="0">
+                <a:solidFill>
+                  <a:srgbClr val="4D4D4D"/>
+                </a:solidFill>
+                <a:latin typeface="微軟正黑體"/>
+                <a:ea typeface="微軟正黑體"/>
+                <a:cs typeface="微軟正黑體"/>
+              </a:rPr>
+              <a:t>末位業者僅 </a:t>
+            </a:r>
+            <a:r>
+              <a:rPr sz="1100" b="1">
+                <a:solidFill>
+                  <a:srgbClr val="1A1A1A"/>
+                </a:solidFill>
+                <a:highlight>
+                  <a:srgbClr val="FFFF00"/>
+                </a:highlight>
+                <a:latin typeface="微軟正黑體"/>
+                <a:ea typeface="微軟正黑體"/>
+                <a:cs typeface="微軟正黑體"/>
+              </a:rPr>
+              <a:t>13,781</a:t>
+            </a:r>
+            <a:r>
+              <a:rPr sz="1100" b="0">
+                <a:solidFill>
+                  <a:srgbClr val="4D4D4D"/>
+                </a:solidFill>
+                <a:latin typeface="微軟正黑體"/>
+                <a:ea typeface="微軟正黑體"/>
+                <a:cs typeface="微軟正黑體"/>
+              </a:rPr>
+              <a:t>，與領先者之間的落差顯示中小型業者在此指標上缺乏可持續的規模優勢</a:t>
             </a:r>
           </a:p>
           <a:p>
-            <a:pPr lvl="1"/>
-            <a:r>
-              <a:rPr sz="1200"/>
-              <a:t>末位者僅 13,781</a:t>
+            <a:pPr>
+              <a:spcAft>
+                <a:spcPts val="800"/>
+              </a:spcAft>
+            </a:pPr>
+            <a:r>
+              <a:rPr sz="1100" b="1">
+                <a:solidFill>
+                  <a:srgbClr val="C12026"/>
+                </a:solidFill>
+                <a:latin typeface="微軟正黑體"/>
+                <a:ea typeface="微軟正黑體"/>
+                <a:cs typeface="微軟正黑體"/>
+              </a:rPr>
+              <a:t>▸ </a:t>
+            </a:r>
+            <a:r>
+              <a:rPr sz="1100" b="0">
+                <a:solidFill>
+                  <a:srgbClr val="4D4D4D"/>
+                </a:solidFill>
+                <a:latin typeface="微軟正黑體"/>
+                <a:ea typeface="微軟正黑體"/>
+                <a:cs typeface="微軟正黑體"/>
+              </a:rPr>
+              <a:t>全體平均為 </a:t>
+            </a:r>
+            <a:r>
+              <a:rPr sz="1100" b="1">
+                <a:solidFill>
+                  <a:srgbClr val="1A1A1A"/>
+                </a:solidFill>
+                <a:highlight>
+                  <a:srgbClr val="FFFF00"/>
+                </a:highlight>
+                <a:latin typeface="微軟正黑體"/>
+                <a:ea typeface="微軟正黑體"/>
+                <a:cs typeface="微軟正黑體"/>
+              </a:rPr>
+              <a:t>55,689.2</a:t>
+            </a:r>
+            <a:r>
+              <a:rPr sz="1100" b="0">
+                <a:solidFill>
+                  <a:srgbClr val="4D4D4D"/>
+                </a:solidFill>
+                <a:latin typeface="微軟正黑體"/>
+                <a:ea typeface="微軟正黑體"/>
+                <a:cs typeface="微軟正黑體"/>
+              </a:rPr>
+              <a:t>，位於平均之下的業者需重新檢視資源配置是否與市場競爭強度相稱</a:t>
             </a:r>
           </a:p>
         </p:txBody>
@@ -6150,23 +7169,142 @@
           <a:bodyPr/>
           <a:lstStyle/>
           <a:p>
-            <a:r>
+            <a:pPr algn="l"/>
+            <a:r>
+              <a:rPr sz="2200" b="0">
+                <a:solidFill>
+                  <a:srgbClr val="1A1A1A"/>
+                </a:solidFill>
+                <a:latin typeface="微軟正黑體"/>
+                <a:ea typeface="微軟正黑體"/>
+                <a:cs typeface="微軟正黑體"/>
+              </a:rPr>
               <a:t>轉銷呆帳分佈</a:t>
+            </a:r>
+          </a:p>
+        </p:txBody>
+      </p:sp>
+      <p:sp>
+        <p:nvSpPr>
+          <p:cNvPr id="4" name="Rectangle 3"/>
+          <p:cNvSpPr/>
+          <p:nvPr/>
+        </p:nvSpPr>
+        <p:spPr>
+          <a:xfrm>
+            <a:off x="368595" y="1247553"/>
+            <a:ext cx="57150" cy="457200"/>
+          </a:xfrm>
+          <a:prstGeom prst="rect">
+            <a:avLst/>
+          </a:prstGeom>
+          <a:solidFill>
+            <a:srgbClr val="FFC000"/>
+          </a:solidFill>
+          <a:ln>
+            <a:noFill/>
+          </a:ln>
+          <a:effectLst/>
+        </p:spPr>
+        <p:style>
+          <a:lnRef idx="1">
+            <a:schemeClr val="accent1"/>
+          </a:lnRef>
+          <a:fillRef idx="3">
+            <a:schemeClr val="accent1"/>
+          </a:fillRef>
+          <a:effectRef idx="2">
+            <a:schemeClr val="accent1"/>
+          </a:effectRef>
+          <a:fontRef idx="minor">
+            <a:schemeClr val="lt1"/>
+          </a:fontRef>
+        </p:style>
+        <p:txBody>
+          <a:bodyPr rtlCol="0" anchor="ctr"/>
+          <a:lstStyle/>
+          <a:p>
+            <a:pPr algn="ctr"/>
+          </a:p>
+        </p:txBody>
+      </p:sp>
+      <p:sp>
+        <p:nvSpPr>
+          <p:cNvPr id="5" name="Rectangle 4"/>
+          <p:cNvSpPr/>
+          <p:nvPr/>
+        </p:nvSpPr>
+        <p:spPr>
+          <a:xfrm>
+            <a:off x="425745" y="1247553"/>
+            <a:ext cx="11185350" cy="457200"/>
+          </a:xfrm>
+          <a:prstGeom prst="rect">
+            <a:avLst/>
+          </a:prstGeom>
+          <a:solidFill>
+            <a:srgbClr val="FFF8D6"/>
+          </a:solidFill>
+          <a:ln>
+            <a:noFill/>
+          </a:ln>
+          <a:effectLst/>
+        </p:spPr>
+        <p:style>
+          <a:lnRef idx="1">
+            <a:schemeClr val="accent1"/>
+          </a:lnRef>
+          <a:fillRef idx="3">
+            <a:schemeClr val="accent1"/>
+          </a:fillRef>
+          <a:effectRef idx="2">
+            <a:schemeClr val="accent1"/>
+          </a:effectRef>
+          <a:fontRef idx="minor">
+            <a:schemeClr val="lt1"/>
+          </a:fontRef>
+        </p:style>
+        <p:txBody>
+          <a:bodyPr rtlCol="0" anchor="ctr" wrap="square" lIns="175260"/>
+          <a:lstStyle/>
+          <a:p>
+            <a:pPr algn="l"/>
+            <a:r>
+              <a:rPr sz="1300" b="1">
+                <a:solidFill>
+                  <a:srgbClr val="C12026"/>
+                </a:solidFill>
+                <a:latin typeface="微軟正黑體"/>
+                <a:ea typeface="微軟正黑體"/>
+                <a:cs typeface="微軟正黑體"/>
+              </a:rPr>
+              <a:t>◆ </a:t>
+            </a:r>
+            <a:r>
+              <a:rPr sz="1300" b="1">
+                <a:solidFill>
+                  <a:srgbClr val="1A1A1A"/>
+                </a:solidFill>
+                <a:latin typeface="微軟正黑體"/>
+                <a:ea typeface="微軟正黑體"/>
+                <a:cs typeface="微軟正黑體"/>
+              </a:rPr>
+              <a:t>當月轉銷呆帳金額 Top 10呈現明顯的業者集中態勢，規模差距短期內難以收斂</a:t>
             </a:r>
           </a:p>
         </p:txBody>
       </p:sp>
       <p:graphicFrame>
         <p:nvGraphicFramePr>
-          <p:cNvPr id="4" name="Table 3"/>
+          <p:cNvPr id="6" name="Table 5"/>
           <p:cNvGraphicFramePr>
             <a:graphicFrameLocks noGrp="1"/>
           </p:cNvGraphicFramePr>
           <p:nvPr/>
         </p:nvGraphicFramePr>
         <p:xfrm>
-          <a:off x="368595" y="1247553"/>
-          <a:ext cx="6608340" cy="4880100"/>
+          <a:off x="368595" y="1854753"/>
+          <a:ext cx="6608340" cy="4272900"/>
         </p:xfrm>
         <a:graphic>
           <a:graphicData uri="http://schemas.openxmlformats.org/drawingml/2006/table">
@@ -6183,7 +7321,7 @@
                 <a:gridCol w="944048"/>
                 <a:gridCol w="944052"/>
               </a:tblGrid>
-              <a:tr h="443645">
+              <a:tr h="388445">
                 <a:tc>
                   <a:txBody>
                     <a:bodyPr/>
@@ -6332,7 +7470,7 @@
                   </a:tcPr>
                 </a:tc>
               </a:tr>
-              <a:tr h="443645">
+              <a:tr h="388445">
                 <a:tc>
                   <a:txBody>
                     <a:bodyPr/>
@@ -6473,7 +7611,7 @@
                   </a:tcPr>
                 </a:tc>
               </a:tr>
-              <a:tr h="443645">
+              <a:tr h="388445">
                 <a:tc>
                   <a:txBody>
                     <a:bodyPr/>
@@ -6614,7 +7752,7 @@
                   </a:tcPr>
                 </a:tc>
               </a:tr>
-              <a:tr h="443645">
+              <a:tr h="388445">
                 <a:tc>
                   <a:txBody>
                     <a:bodyPr/>
@@ -6755,7 +7893,7 @@
                   </a:tcPr>
                 </a:tc>
               </a:tr>
-              <a:tr h="443645">
+              <a:tr h="388445">
                 <a:tc>
                   <a:txBody>
                     <a:bodyPr/>
@@ -6896,7 +8034,7 @@
                   </a:tcPr>
                 </a:tc>
               </a:tr>
-              <a:tr h="443645">
+              <a:tr h="388445">
                 <a:tc>
                   <a:txBody>
                     <a:bodyPr/>
@@ -7021,7 +8159,7 @@
                   </a:tcPr>
                 </a:tc>
               </a:tr>
-              <a:tr h="443645">
+              <a:tr h="388445">
                 <a:tc>
                   <a:txBody>
                     <a:bodyPr/>
@@ -7138,7 +8276,7 @@
                   </a:tcPr>
                 </a:tc>
               </a:tr>
-              <a:tr h="443645">
+              <a:tr h="388445">
                 <a:tc>
                   <a:txBody>
                     <a:bodyPr/>
@@ -7255,7 +8393,7 @@
                   </a:tcPr>
                 </a:tc>
               </a:tr>
-              <a:tr h="443645">
+              <a:tr h="388445">
                 <a:tc>
                   <a:txBody>
                     <a:bodyPr/>
@@ -7372,7 +8510,7 @@
                   </a:tcPr>
                 </a:tc>
               </a:tr>
-              <a:tr h="443645">
+              <a:tr h="388445">
                 <a:tc>
                   <a:txBody>
                     <a:bodyPr/>
@@ -7489,7 +8627,7 @@
                   </a:tcPr>
                 </a:tc>
               </a:tr>
-              <a:tr h="443650">
+              <a:tr h="388450">
                 <a:tc>
                   <a:txBody>
                     <a:bodyPr/>
@@ -7610,6 +8748,42 @@
           </a:graphicData>
         </a:graphic>
       </p:graphicFrame>
+      <p:sp>
+        <p:nvSpPr>
+          <p:cNvPr id="7" name="TextBox 6"/>
+          <p:cNvSpPr txBox="1"/>
+          <p:nvPr/>
+        </p:nvSpPr>
+        <p:spPr>
+          <a:xfrm>
+            <a:off x="368595" y="6150000"/>
+            <a:ext cx="11242500" cy="250000"/>
+          </a:xfrm>
+          <a:prstGeom prst="rect">
+            <a:avLst/>
+          </a:prstGeom>
+          <a:noFill/>
+        </p:spPr>
+        <p:txBody>
+          <a:bodyPr wrap="none">
+            <a:spAutoFit/>
+          </a:bodyPr>
+          <a:lstStyle/>
+          <a:p>
+            <a:r>
+              <a:rPr sz="1000" b="0">
+                <a:solidFill>
+                  <a:srgbClr val="666666"/>
+                </a:solidFill>
+                <a:latin typeface="微軟正黑體"/>
+                <a:ea typeface="微軟正黑體"/>
+                <a:cs typeface="微軟正黑體"/>
+              </a:rPr>
+              <a:t>本表數值與隨附 Excel 稽核檔逐格一致</a:t>
+            </a:r>
+          </a:p>
+        </p:txBody>
+      </p:sp>
     </p:spTree>
   </p:cSld>
   <p:clrMapOvr>
@@ -7644,8 +8818,73 @@
           <a:lstStyle/>
           <a:p>
             <a:r>
+              <a:rPr sz="1400" b="0">
+                <a:solidFill>
+                  <a:srgbClr val="C12026"/>
+                </a:solidFill>
+                <a:latin typeface="微軟正黑體"/>
+                <a:ea typeface="微軟正黑體"/>
+                <a:cs typeface="微軟正黑體"/>
+              </a:rPr>
+              <a:t>CHAPTER 07</a:t>
+            </a:r>
+          </a:p>
+          <a:p>
+            <a:r>
+              <a:rPr sz="3200" b="1">
+                <a:solidFill>
+                  <a:srgbClr val="4D4D4D"/>
+                </a:solidFill>
+                <a:latin typeface="微軟正黑體"/>
+                <a:ea typeface="微軟正黑體"/>
+                <a:cs typeface="微軟正黑體"/>
+              </a:rPr>
               <a:t>未來趨勢推測</a:t>
             </a:r>
+          </a:p>
+        </p:txBody>
+      </p:sp>
+      <p:sp>
+        <p:nvSpPr>
+          <p:cNvPr id="3" name="Rectangle 2"/>
+          <p:cNvSpPr/>
+          <p:nvPr/>
+        </p:nvSpPr>
+        <p:spPr>
+          <a:xfrm>
+            <a:off x="831851" y="5737075"/>
+            <a:ext cx="1905000" cy="28575"/>
+          </a:xfrm>
+          <a:prstGeom prst="rect">
+            <a:avLst/>
+          </a:prstGeom>
+          <a:solidFill>
+            <a:srgbClr val="C12026"/>
+          </a:solidFill>
+          <a:ln>
+            <a:noFill/>
+          </a:ln>
+          <a:effectLst/>
+        </p:spPr>
+        <p:style>
+          <a:lnRef idx="1">
+            <a:schemeClr val="accent1"/>
+          </a:lnRef>
+          <a:fillRef idx="3">
+            <a:schemeClr val="accent1"/>
+          </a:fillRef>
+          <a:effectRef idx="2">
+            <a:schemeClr val="accent1"/>
+          </a:effectRef>
+          <a:fontRef idx="minor">
+            <a:schemeClr val="lt1"/>
+          </a:fontRef>
+        </p:style>
+        <p:txBody>
+          <a:bodyPr rtlCol="0" anchor="ctr"/>
+          <a:lstStyle/>
+          <a:p>
+            <a:pPr algn="ctr"/>
           </a:p>
         </p:txBody>
       </p:sp>
@@ -7679,32 +8918,200 @@
         </p:nvSpPr>
         <p:spPr>
           <a:xfrm>
-            <a:off x="7205535" y="1247553"/>
-            <a:ext cx="4405560" cy="4880100"/>
+            <a:off x="7205535" y="1854753"/>
+            <a:ext cx="4405560" cy="4272900"/>
           </a:xfrm>
         </p:spPr>
         <p:txBody>
-          <a:bodyPr wrap="square"/>
+          <a:bodyPr wrap="square">
+            <a:normAutofit/>
+          </a:bodyPr>
           <a:lstStyle/>
           <a:p>
-            <a:pPr/>
-            <a:r>
-              <a:rPr b="1" sz="1600"/>
-              <a:t>市場整體（各期） 趨勢外推呈現明顯的業者集中態勢</a:t>
+            <a:pPr>
+              <a:spcAft>
+                <a:spcPts val="800"/>
+              </a:spcAft>
+            </a:pPr>
+            <a:r>
+              <a:rPr sz="1100" b="1">
+                <a:solidFill>
+                  <a:srgbClr val="C12026"/>
+                </a:solidFill>
+                <a:latin typeface="微軟正黑體"/>
+                <a:ea typeface="微軟正黑體"/>
+                <a:cs typeface="微軟正黑體"/>
+              </a:rPr>
+              <a:t>▸ </a:t>
+            </a:r>
+            <a:r>
+              <a:rPr sz="1100" b="0">
+                <a:solidFill>
+                  <a:srgbClr val="4D4D4D"/>
+                </a:solidFill>
+                <a:latin typeface="微軟正黑體"/>
+                <a:ea typeface="微軟正黑體"/>
+                <a:cs typeface="微軟正黑體"/>
+              </a:rPr>
+              <a:t>領先者 </a:t>
+            </a:r>
+            <a:r>
+              <a:rPr sz="1100" b="1">
+                <a:solidFill>
+                  <a:srgbClr val="1A1A1A"/>
+                </a:solidFill>
+                <a:highlight>
+                  <a:srgbClr val="FFFF00"/>
+                </a:highlight>
+                <a:latin typeface="微軟正黑體"/>
+                <a:ea typeface="微軟正黑體"/>
+                <a:cs typeface="微軟正黑體"/>
+              </a:rPr>
+              <a:t>11401</a:t>
+            </a:r>
+            <a:r>
+              <a:rPr sz="1100" b="0">
+                <a:solidFill>
+                  <a:srgbClr val="4D4D4D"/>
+                </a:solidFill>
+                <a:latin typeface="微軟正黑體"/>
+                <a:ea typeface="微軟正黑體"/>
+                <a:cs typeface="微軟正黑體"/>
+              </a:rPr>
+              <a:t> 達 </a:t>
+            </a:r>
+            <a:r>
+              <a:rPr sz="1100" b="1">
+                <a:solidFill>
+                  <a:srgbClr val="1A1A1A"/>
+                </a:solidFill>
+                <a:highlight>
+                  <a:srgbClr val="FFFF00"/>
+                </a:highlight>
+                <a:latin typeface="微軟正黑體"/>
+                <a:ea typeface="微軟正黑體"/>
+                <a:cs typeface="微軟正黑體"/>
+              </a:rPr>
+              <a:t>654,750</a:t>
+            </a:r>
+            <a:r>
+              <a:rPr sz="1100" b="0">
+                <a:solidFill>
+                  <a:srgbClr val="4D4D4D"/>
+                </a:solidFill>
+                <a:latin typeface="微軟正黑體"/>
+                <a:ea typeface="微軟正黑體"/>
+                <a:cs typeface="微軟正黑體"/>
+              </a:rPr>
+              <a:t>，明顯拉開與其餘業者的距離，反映規模效應仍在累積</a:t>
             </a:r>
           </a:p>
           <a:p>
-            <a:pPr lvl="1"/>
-            <a:r>
-              <a:rPr sz="1200"/>
-              <a:t>領先者 11401 達 654,750</a:t>
+            <a:pPr>
+              <a:spcAft>
+                <a:spcPts val="800"/>
+              </a:spcAft>
+            </a:pPr>
+            <a:r>
+              <a:rPr sz="1100" b="1">
+                <a:solidFill>
+                  <a:srgbClr val="C12026"/>
+                </a:solidFill>
+                <a:latin typeface="微軟正黑體"/>
+                <a:ea typeface="微軟正黑體"/>
+                <a:cs typeface="微軟正黑體"/>
+              </a:rPr>
+              <a:t>▸ </a:t>
+            </a:r>
+            <a:r>
+              <a:rPr sz="1100" b="0">
+                <a:solidFill>
+                  <a:srgbClr val="4D4D4D"/>
+                </a:solidFill>
+                <a:latin typeface="微軟正黑體"/>
+                <a:ea typeface="微軟正黑體"/>
+                <a:cs typeface="微軟正黑體"/>
+              </a:rPr>
+              <a:t>末位業者僅 </a:t>
+            </a:r>
+            <a:r>
+              <a:rPr sz="1100" b="1">
+                <a:solidFill>
+                  <a:srgbClr val="1A1A1A"/>
+                </a:solidFill>
+                <a:highlight>
+                  <a:srgbClr val="FFFF00"/>
+                </a:highlight>
+                <a:latin typeface="微軟正黑體"/>
+                <a:ea typeface="微軟正黑體"/>
+                <a:cs typeface="微軟正黑體"/>
+              </a:rPr>
+              <a:t>572,496</a:t>
+            </a:r>
+            <a:r>
+              <a:rPr sz="1100" b="0">
+                <a:solidFill>
+                  <a:srgbClr val="4D4D4D"/>
+                </a:solidFill>
+                <a:latin typeface="微軟正黑體"/>
+                <a:ea typeface="微軟正黑體"/>
+                <a:cs typeface="微軟正黑體"/>
+              </a:rPr>
+              <a:t>，與領先者之間的落差顯示中小型業者在此指標上缺乏可持續的規模優勢</a:t>
             </a:r>
           </a:p>
           <a:p>
-            <a:pPr lvl="1"/>
-            <a:r>
-              <a:rPr sz="1200"/>
-              <a:t>末位者僅 572,496</a:t>
+            <a:pPr>
+              <a:spcAft>
+                <a:spcPts val="800"/>
+              </a:spcAft>
+            </a:pPr>
+            <a:r>
+              <a:rPr sz="1100" b="1">
+                <a:solidFill>
+                  <a:srgbClr val="C12026"/>
+                </a:solidFill>
+                <a:latin typeface="微軟正黑體"/>
+                <a:ea typeface="微軟正黑體"/>
+                <a:cs typeface="微軟正黑體"/>
+              </a:rPr>
+              <a:t>▸ </a:t>
+            </a:r>
+            <a:r>
+              <a:rPr sz="1100" b="0">
+                <a:solidFill>
+                  <a:srgbClr val="4D4D4D"/>
+                </a:solidFill>
+                <a:latin typeface="微軟正黑體"/>
+                <a:ea typeface="微軟正黑體"/>
+                <a:cs typeface="微軟正黑體"/>
+              </a:rPr>
+              <a:t>全體平均為 </a:t>
+            </a:r>
+            <a:r>
+              <a:rPr sz="1100" b="1">
+                <a:solidFill>
+                  <a:srgbClr val="1A1A1A"/>
+                </a:solidFill>
+                <a:highlight>
+                  <a:srgbClr val="FFFF00"/>
+                </a:highlight>
+                <a:latin typeface="微軟正黑體"/>
+                <a:ea typeface="微軟正黑體"/>
+                <a:cs typeface="微軟正黑體"/>
+              </a:rPr>
+              <a:t>615,418.1</a:t>
+            </a:r>
+            <a:r>
+              <a:rPr sz="1100" b="0">
+                <a:solidFill>
+                  <a:srgbClr val="4D4D4D"/>
+                </a:solidFill>
+                <a:latin typeface="微軟正黑體"/>
+                <a:ea typeface="微軟正黑體"/>
+                <a:cs typeface="微軟正黑體"/>
+              </a:rPr>
+              <a:t>，位於平均之下的業者需重新檢視資源配置是否與市場競爭強度相稱</a:t>
             </a:r>
           </a:p>
         </p:txBody>
@@ -7724,23 +9131,142 @@
           <a:bodyPr/>
           <a:lstStyle/>
           <a:p>
-            <a:r>
+            <a:pPr algn="l"/>
+            <a:r>
+              <a:rPr sz="2200" b="0">
+                <a:solidFill>
+                  <a:srgbClr val="1A1A1A"/>
+                </a:solidFill>
+                <a:latin typeface="微軟正黑體"/>
+                <a:ea typeface="微軟正黑體"/>
+                <a:cs typeface="微軟正黑體"/>
+              </a:rPr>
               <a:t>市場規模外推</a:t>
+            </a:r>
+          </a:p>
+        </p:txBody>
+      </p:sp>
+      <p:sp>
+        <p:nvSpPr>
+          <p:cNvPr id="4" name="Rectangle 3"/>
+          <p:cNvSpPr/>
+          <p:nvPr/>
+        </p:nvSpPr>
+        <p:spPr>
+          <a:xfrm>
+            <a:off x="368595" y="1247553"/>
+            <a:ext cx="57150" cy="457200"/>
+          </a:xfrm>
+          <a:prstGeom prst="rect">
+            <a:avLst/>
+          </a:prstGeom>
+          <a:solidFill>
+            <a:srgbClr val="FFC000"/>
+          </a:solidFill>
+          <a:ln>
+            <a:noFill/>
+          </a:ln>
+          <a:effectLst/>
+        </p:spPr>
+        <p:style>
+          <a:lnRef idx="1">
+            <a:schemeClr val="accent1"/>
+          </a:lnRef>
+          <a:fillRef idx="3">
+            <a:schemeClr val="accent1"/>
+          </a:fillRef>
+          <a:effectRef idx="2">
+            <a:schemeClr val="accent1"/>
+          </a:effectRef>
+          <a:fontRef idx="minor">
+            <a:schemeClr val="lt1"/>
+          </a:fontRef>
+        </p:style>
+        <p:txBody>
+          <a:bodyPr rtlCol="0" anchor="ctr"/>
+          <a:lstStyle/>
+          <a:p>
+            <a:pPr algn="ctr"/>
+          </a:p>
+        </p:txBody>
+      </p:sp>
+      <p:sp>
+        <p:nvSpPr>
+          <p:cNvPr id="5" name="Rectangle 4"/>
+          <p:cNvSpPr/>
+          <p:nvPr/>
+        </p:nvSpPr>
+        <p:spPr>
+          <a:xfrm>
+            <a:off x="425745" y="1247553"/>
+            <a:ext cx="11185350" cy="457200"/>
+          </a:xfrm>
+          <a:prstGeom prst="rect">
+            <a:avLst/>
+          </a:prstGeom>
+          <a:solidFill>
+            <a:srgbClr val="FFF8D6"/>
+          </a:solidFill>
+          <a:ln>
+            <a:noFill/>
+          </a:ln>
+          <a:effectLst/>
+        </p:spPr>
+        <p:style>
+          <a:lnRef idx="1">
+            <a:schemeClr val="accent1"/>
+          </a:lnRef>
+          <a:fillRef idx="3">
+            <a:schemeClr val="accent1"/>
+          </a:fillRef>
+          <a:effectRef idx="2">
+            <a:schemeClr val="accent1"/>
+          </a:effectRef>
+          <a:fontRef idx="minor">
+            <a:schemeClr val="lt1"/>
+          </a:fontRef>
+        </p:style>
+        <p:txBody>
+          <a:bodyPr rtlCol="0" anchor="ctr" wrap="square" lIns="175260"/>
+          <a:lstStyle/>
+          <a:p>
+            <a:pPr algn="l"/>
+            <a:r>
+              <a:rPr sz="1300" b="1">
+                <a:solidFill>
+                  <a:srgbClr val="C12026"/>
+                </a:solidFill>
+                <a:latin typeface="微軟正黑體"/>
+                <a:ea typeface="微軟正黑體"/>
+                <a:cs typeface="微軟正黑體"/>
+              </a:rPr>
+              <a:t>◆ </a:t>
+            </a:r>
+            <a:r>
+              <a:rPr sz="1300" b="1">
+                <a:solidFill>
+                  <a:srgbClr val="1A1A1A"/>
+                </a:solidFill>
+                <a:latin typeface="微軟正黑體"/>
+                <a:ea typeface="微軟正黑體"/>
+                <a:cs typeface="微軟正黑體"/>
+              </a:rPr>
+              <a:t>市場整體（各期） 趨勢外推呈現明顯的業者集中態勢，規模差距短期內難以收斂</a:t>
             </a:r>
           </a:p>
         </p:txBody>
       </p:sp>
       <p:graphicFrame>
         <p:nvGraphicFramePr>
-          <p:cNvPr id="4" name="Chart 3"/>
+          <p:cNvPr id="6" name="Chart 5"/>
           <p:cNvGraphicFramePr>
             <a:graphicFrameLocks noGrp="1"/>
           </p:cNvGraphicFramePr>
           <p:nvPr/>
         </p:nvGraphicFramePr>
         <p:xfrm>
-          <a:off x="368595" y="1247553"/>
-          <a:ext cx="6608340" cy="4880100"/>
+          <a:off x="368595" y="1854753"/>
+          <a:ext cx="6608340" cy="4272900"/>
         </p:xfrm>
         <a:graphic>
           <a:graphicData uri="http://schemas.openxmlformats.org/drawingml/2006/chart">
@@ -7748,6 +9274,42 @@
           </a:graphicData>
         </a:graphic>
       </p:graphicFrame>
+      <p:sp>
+        <p:nvSpPr>
+          <p:cNvPr id="7" name="TextBox 6"/>
+          <p:cNvSpPr txBox="1"/>
+          <p:nvPr/>
+        </p:nvSpPr>
+        <p:spPr>
+          <a:xfrm>
+            <a:off x="368595" y="6150000"/>
+            <a:ext cx="11242500" cy="250000"/>
+          </a:xfrm>
+          <a:prstGeom prst="rect">
+            <a:avLst/>
+          </a:prstGeom>
+          <a:noFill/>
+        </p:spPr>
+        <p:txBody>
+          <a:bodyPr wrap="none">
+            <a:spAutoFit/>
+          </a:bodyPr>
+          <a:lstStyle/>
+          <a:p>
+            <a:r>
+              <a:rPr sz="1000" b="0">
+                <a:solidFill>
+                  <a:srgbClr val="666666"/>
+                </a:solidFill>
+                <a:latin typeface="微軟正黑體"/>
+                <a:ea typeface="微軟正黑體"/>
+                <a:cs typeface="微軟正黑體"/>
+              </a:rPr>
+              <a:t>可點選圖表右鍵「編輯資料」查看原始 EXCEL 資料表</a:t>
+            </a:r>
+          </a:p>
+        </p:txBody>
+      </p:sp>
     </p:spTree>
   </p:cSld>
   <p:clrMapOvr>
@@ -7782,8 +9344,73 @@
           <a:lstStyle/>
           <a:p>
             <a:r>
+              <a:rPr sz="1400" b="0">
+                <a:solidFill>
+                  <a:srgbClr val="C12026"/>
+                </a:solidFill>
+                <a:latin typeface="微軟正黑體"/>
+                <a:ea typeface="微軟正黑體"/>
+                <a:cs typeface="微軟正黑體"/>
+              </a:rPr>
+              <a:t>CHAPTER 08</a:t>
+            </a:r>
+          </a:p>
+          <a:p>
+            <a:r>
+              <a:rPr sz="3200" b="1">
+                <a:solidFill>
+                  <a:srgbClr val="4D4D4D"/>
+                </a:solidFill>
+                <a:latin typeface="微軟正黑體"/>
+                <a:ea typeface="微軟正黑體"/>
+                <a:cs typeface="微軟正黑體"/>
+              </a:rPr>
               <a:t>對台新的策略建議</a:t>
             </a:r>
+          </a:p>
+        </p:txBody>
+      </p:sp>
+      <p:sp>
+        <p:nvSpPr>
+          <p:cNvPr id="3" name="Rectangle 2"/>
+          <p:cNvSpPr/>
+          <p:nvPr/>
+        </p:nvSpPr>
+        <p:spPr>
+          <a:xfrm>
+            <a:off x="831851" y="5737075"/>
+            <a:ext cx="1905000" cy="28575"/>
+          </a:xfrm>
+          <a:prstGeom prst="rect">
+            <a:avLst/>
+          </a:prstGeom>
+          <a:solidFill>
+            <a:srgbClr val="C12026"/>
+          </a:solidFill>
+          <a:ln>
+            <a:noFill/>
+          </a:ln>
+          <a:effectLst/>
+        </p:spPr>
+        <p:style>
+          <a:lnRef idx="1">
+            <a:schemeClr val="accent1"/>
+          </a:lnRef>
+          <a:fillRef idx="3">
+            <a:schemeClr val="accent1"/>
+          </a:fillRef>
+          <a:effectRef idx="2">
+            <a:schemeClr val="accent1"/>
+          </a:effectRef>
+          <a:fontRef idx="minor">
+            <a:schemeClr val="lt1"/>
+          </a:fontRef>
+        </p:style>
+        <p:txBody>
+          <a:bodyPr rtlCol="0" anchor="ctr"/>
+          <a:lstStyle/>
+          <a:p>
+            <a:pPr algn="ctr"/>
           </a:p>
         </p:txBody>
       </p:sp>
@@ -7817,32 +9444,200 @@
         </p:nvSpPr>
         <p:spPr>
           <a:xfrm>
-            <a:off x="7205535" y="1247553"/>
-            <a:ext cx="4405560" cy="4880100"/>
+            <a:off x="7205535" y="1854753"/>
+            <a:ext cx="4405560" cy="4272900"/>
           </a:xfrm>
         </p:spPr>
         <p:txBody>
-          <a:bodyPr wrap="square"/>
+          <a:bodyPr wrap="square">
+            <a:normAutofit/>
+          </a:bodyPr>
           <a:lstStyle/>
           <a:p>
-            <a:pPr/>
-            <a:r>
-              <a:rPr b="1" sz="1600"/>
-              <a:t>循環信用餘額 占比呈現明顯的業者集中態勢</a:t>
+            <a:pPr>
+              <a:spcAft>
+                <a:spcPts val="800"/>
+              </a:spcAft>
+            </a:pPr>
+            <a:r>
+              <a:rPr sz="1100" b="1">
+                <a:solidFill>
+                  <a:srgbClr val="C12026"/>
+                </a:solidFill>
+                <a:latin typeface="微軟正黑體"/>
+                <a:ea typeface="微軟正黑體"/>
+                <a:cs typeface="微軟正黑體"/>
+              </a:rPr>
+              <a:t>▸ </a:t>
+            </a:r>
+            <a:r>
+              <a:rPr sz="1100" b="0">
+                <a:solidFill>
+                  <a:srgbClr val="4D4D4D"/>
+                </a:solidFill>
+                <a:latin typeface="微軟正黑體"/>
+                <a:ea typeface="微軟正黑體"/>
+                <a:cs typeface="微軟正黑體"/>
+              </a:rPr>
+              <a:t>領先者 </a:t>
+            </a:r>
+            <a:r>
+              <a:rPr sz="1100" b="1">
+                <a:solidFill>
+                  <a:srgbClr val="1A1A1A"/>
+                </a:solidFill>
+                <a:highlight>
+                  <a:srgbClr val="FFFF00"/>
+                </a:highlight>
+                <a:latin typeface="微軟正黑體"/>
+                <a:ea typeface="微軟正黑體"/>
+                <a:cs typeface="微軟正黑體"/>
+              </a:rPr>
+              <a:t>國泰世華商業銀行</a:t>
+            </a:r>
+            <a:r>
+              <a:rPr sz="1100" b="0">
+                <a:solidFill>
+                  <a:srgbClr val="4D4D4D"/>
+                </a:solidFill>
+                <a:latin typeface="微軟正黑體"/>
+                <a:ea typeface="微軟正黑體"/>
+                <a:cs typeface="微軟正黑體"/>
+              </a:rPr>
+              <a:t> 達 </a:t>
+            </a:r>
+            <a:r>
+              <a:rPr sz="1100" b="1">
+                <a:solidFill>
+                  <a:srgbClr val="1A1A1A"/>
+                </a:solidFill>
+                <a:highlight>
+                  <a:srgbClr val="FFFF00"/>
+                </a:highlight>
+                <a:latin typeface="微軟正黑體"/>
+                <a:ea typeface="微軟正黑體"/>
+                <a:cs typeface="微軟正黑體"/>
+              </a:rPr>
+              <a:t>18.7%</a:t>
+            </a:r>
+            <a:r>
+              <a:rPr sz="1100" b="0">
+                <a:solidFill>
+                  <a:srgbClr val="4D4D4D"/>
+                </a:solidFill>
+                <a:latin typeface="微軟正黑體"/>
+                <a:ea typeface="微軟正黑體"/>
+                <a:cs typeface="微軟正黑體"/>
+              </a:rPr>
+              <a:t>，明顯拉開與其餘業者的距離，反映規模效應仍在累積</a:t>
             </a:r>
           </a:p>
           <a:p>
-            <a:pPr lvl="1"/>
-            <a:r>
-              <a:rPr sz="1200"/>
-              <a:t>領先者 國泰世華商業銀行 達 18.7%</a:t>
+            <a:pPr>
+              <a:spcAft>
+                <a:spcPts val="800"/>
+              </a:spcAft>
+            </a:pPr>
+            <a:r>
+              <a:rPr sz="1100" b="1">
+                <a:solidFill>
+                  <a:srgbClr val="C12026"/>
+                </a:solidFill>
+                <a:latin typeface="微軟正黑體"/>
+                <a:ea typeface="微軟正黑體"/>
+                <a:cs typeface="微軟正黑體"/>
+              </a:rPr>
+              <a:t>▸ </a:t>
+            </a:r>
+            <a:r>
+              <a:rPr sz="1100" b="0">
+                <a:solidFill>
+                  <a:srgbClr val="4D4D4D"/>
+                </a:solidFill>
+                <a:latin typeface="微軟正黑體"/>
+                <a:ea typeface="微軟正黑體"/>
+                <a:cs typeface="微軟正黑體"/>
+              </a:rPr>
+              <a:t>末位業者僅 </a:t>
+            </a:r>
+            <a:r>
+              <a:rPr sz="1100" b="1">
+                <a:solidFill>
+                  <a:srgbClr val="1A1A1A"/>
+                </a:solidFill>
+                <a:highlight>
+                  <a:srgbClr val="FFFF00"/>
+                </a:highlight>
+                <a:latin typeface="微軟正黑體"/>
+                <a:ea typeface="微軟正黑體"/>
+                <a:cs typeface="微軟正黑體"/>
+              </a:rPr>
+              <a:t>0.0%</a:t>
+            </a:r>
+            <a:r>
+              <a:rPr sz="1100" b="0">
+                <a:solidFill>
+                  <a:srgbClr val="4D4D4D"/>
+                </a:solidFill>
+                <a:latin typeface="微軟正黑體"/>
+                <a:ea typeface="微軟正黑體"/>
+                <a:cs typeface="微軟正黑體"/>
+              </a:rPr>
+              <a:t>，與領先者之間的落差顯示中小型業者在此指標上缺乏可持續的規模優勢</a:t>
             </a:r>
           </a:p>
           <a:p>
-            <a:pPr lvl="1"/>
-            <a:r>
-              <a:rPr sz="1200"/>
-              <a:t>末位者僅 0.0%</a:t>
+            <a:pPr>
+              <a:spcAft>
+                <a:spcPts val="800"/>
+              </a:spcAft>
+            </a:pPr>
+            <a:r>
+              <a:rPr sz="1100" b="1">
+                <a:solidFill>
+                  <a:srgbClr val="C12026"/>
+                </a:solidFill>
+                <a:latin typeface="微軟正黑體"/>
+                <a:ea typeface="微軟正黑體"/>
+                <a:cs typeface="微軟正黑體"/>
+              </a:rPr>
+              <a:t>▸ </a:t>
+            </a:r>
+            <a:r>
+              <a:rPr sz="1100" b="0">
+                <a:solidFill>
+                  <a:srgbClr val="4D4D4D"/>
+                </a:solidFill>
+                <a:latin typeface="微軟正黑體"/>
+                <a:ea typeface="微軟正黑體"/>
+                <a:cs typeface="微軟正黑體"/>
+              </a:rPr>
+              <a:t>全體平均為 </a:t>
+            </a:r>
+            <a:r>
+              <a:rPr sz="1100" b="1">
+                <a:solidFill>
+                  <a:srgbClr val="1A1A1A"/>
+                </a:solidFill>
+                <a:highlight>
+                  <a:srgbClr val="FFFF00"/>
+                </a:highlight>
+                <a:latin typeface="微軟正黑體"/>
+                <a:ea typeface="微軟正黑體"/>
+                <a:cs typeface="微軟正黑體"/>
+              </a:rPr>
+              <a:t>3.1%</a:t>
+            </a:r>
+            <a:r>
+              <a:rPr sz="1100" b="0">
+                <a:solidFill>
+                  <a:srgbClr val="4D4D4D"/>
+                </a:solidFill>
+                <a:latin typeface="微軟正黑體"/>
+                <a:ea typeface="微軟正黑體"/>
+                <a:cs typeface="微軟正黑體"/>
+              </a:rPr>
+              <a:t>，位於平均之下的業者需重新檢視資源配置是否與市場競爭強度相稱</a:t>
             </a:r>
           </a:p>
         </p:txBody>
@@ -7862,23 +9657,142 @@
           <a:bodyPr/>
           <a:lstStyle/>
           <a:p>
-            <a:r>
+            <a:pPr algn="l"/>
+            <a:r>
+              <a:rPr sz="2200" b="0">
+                <a:solidFill>
+                  <a:srgbClr val="1A1A1A"/>
+                </a:solidFill>
+                <a:latin typeface="微軟正黑體"/>
+                <a:ea typeface="微軟正黑體"/>
+                <a:cs typeface="微軟正黑體"/>
+              </a:rPr>
               <a:t>市占提升空間</a:t>
+            </a:r>
+          </a:p>
+        </p:txBody>
+      </p:sp>
+      <p:sp>
+        <p:nvSpPr>
+          <p:cNvPr id="4" name="Rectangle 3"/>
+          <p:cNvSpPr/>
+          <p:nvPr/>
+        </p:nvSpPr>
+        <p:spPr>
+          <a:xfrm>
+            <a:off x="368595" y="1247553"/>
+            <a:ext cx="57150" cy="457200"/>
+          </a:xfrm>
+          <a:prstGeom prst="rect">
+            <a:avLst/>
+          </a:prstGeom>
+          <a:solidFill>
+            <a:srgbClr val="FFC000"/>
+          </a:solidFill>
+          <a:ln>
+            <a:noFill/>
+          </a:ln>
+          <a:effectLst/>
+        </p:spPr>
+        <p:style>
+          <a:lnRef idx="1">
+            <a:schemeClr val="accent1"/>
+          </a:lnRef>
+          <a:fillRef idx="3">
+            <a:schemeClr val="accent1"/>
+          </a:fillRef>
+          <a:effectRef idx="2">
+            <a:schemeClr val="accent1"/>
+          </a:effectRef>
+          <a:fontRef idx="minor">
+            <a:schemeClr val="lt1"/>
+          </a:fontRef>
+        </p:style>
+        <p:txBody>
+          <a:bodyPr rtlCol="0" anchor="ctr"/>
+          <a:lstStyle/>
+          <a:p>
+            <a:pPr algn="ctr"/>
+          </a:p>
+        </p:txBody>
+      </p:sp>
+      <p:sp>
+        <p:nvSpPr>
+          <p:cNvPr id="5" name="Rectangle 4"/>
+          <p:cNvSpPr/>
+          <p:nvPr/>
+        </p:nvSpPr>
+        <p:spPr>
+          <a:xfrm>
+            <a:off x="425745" y="1247553"/>
+            <a:ext cx="11185350" cy="457200"/>
+          </a:xfrm>
+          <a:prstGeom prst="rect">
+            <a:avLst/>
+          </a:prstGeom>
+          <a:solidFill>
+            <a:srgbClr val="FFF8D6"/>
+          </a:solidFill>
+          <a:ln>
+            <a:noFill/>
+          </a:ln>
+          <a:effectLst/>
+        </p:spPr>
+        <p:style>
+          <a:lnRef idx="1">
+            <a:schemeClr val="accent1"/>
+          </a:lnRef>
+          <a:fillRef idx="3">
+            <a:schemeClr val="accent1"/>
+          </a:fillRef>
+          <a:effectRef idx="2">
+            <a:schemeClr val="accent1"/>
+          </a:effectRef>
+          <a:fontRef idx="minor">
+            <a:schemeClr val="lt1"/>
+          </a:fontRef>
+        </p:style>
+        <p:txBody>
+          <a:bodyPr rtlCol="0" anchor="ctr" wrap="square" lIns="175260"/>
+          <a:lstStyle/>
+          <a:p>
+            <a:pPr algn="l"/>
+            <a:r>
+              <a:rPr sz="1300" b="1">
+                <a:solidFill>
+                  <a:srgbClr val="C12026"/>
+                </a:solidFill>
+                <a:latin typeface="微軟正黑體"/>
+                <a:ea typeface="微軟正黑體"/>
+                <a:cs typeface="微軟正黑體"/>
+              </a:rPr>
+              <a:t>◆ </a:t>
+            </a:r>
+            <a:r>
+              <a:rPr sz="1300" b="1">
+                <a:solidFill>
+                  <a:srgbClr val="1A1A1A"/>
+                </a:solidFill>
+                <a:latin typeface="微軟正黑體"/>
+                <a:ea typeface="微軟正黑體"/>
+                <a:cs typeface="微軟正黑體"/>
+              </a:rPr>
+              <a:t>循環信用餘額 占比呈現明顯的業者集中態勢，規模差距短期內難以收斂</a:t>
             </a:r>
           </a:p>
         </p:txBody>
       </p:sp>
       <p:graphicFrame>
         <p:nvGraphicFramePr>
-          <p:cNvPr id="4" name="Chart 3"/>
+          <p:cNvPr id="6" name="Chart 5"/>
           <p:cNvGraphicFramePr>
             <a:graphicFrameLocks noGrp="1"/>
           </p:cNvGraphicFramePr>
           <p:nvPr/>
         </p:nvGraphicFramePr>
         <p:xfrm>
-          <a:off x="368595" y="1247553"/>
-          <a:ext cx="6608340" cy="4880100"/>
+          <a:off x="368595" y="1854753"/>
+          <a:ext cx="6608340" cy="4272900"/>
         </p:xfrm>
         <a:graphic>
           <a:graphicData uri="http://schemas.openxmlformats.org/drawingml/2006/chart">
@@ -7886,6 +9800,42 @@
           </a:graphicData>
         </a:graphic>
       </p:graphicFrame>
+      <p:sp>
+        <p:nvSpPr>
+          <p:cNvPr id="7" name="TextBox 6"/>
+          <p:cNvSpPr txBox="1"/>
+          <p:nvPr/>
+        </p:nvSpPr>
+        <p:spPr>
+          <a:xfrm>
+            <a:off x="368595" y="6150000"/>
+            <a:ext cx="11242500" cy="250000"/>
+          </a:xfrm>
+          <a:prstGeom prst="rect">
+            <a:avLst/>
+          </a:prstGeom>
+          <a:noFill/>
+        </p:spPr>
+        <p:txBody>
+          <a:bodyPr wrap="none">
+            <a:spAutoFit/>
+          </a:bodyPr>
+          <a:lstStyle/>
+          <a:p>
+            <a:r>
+              <a:rPr sz="1000" b="0">
+                <a:solidFill>
+                  <a:srgbClr val="666666"/>
+                </a:solidFill>
+                <a:latin typeface="微軟正黑體"/>
+                <a:ea typeface="微軟正黑體"/>
+                <a:cs typeface="微軟正黑體"/>
+              </a:rPr>
+              <a:t>可點選圖表右鍵「編輯資料」查看原始 EXCEL 資料表</a:t>
+            </a:r>
+          </a:p>
+        </p:txBody>
+      </p:sp>
     </p:spTree>
   </p:cSld>
   <p:clrMapOvr>
@@ -7919,59 +9869,264 @@
           <a:bodyPr wrap="square"/>
           <a:lstStyle/>
           <a:p>
-            <a:pPr/>
-            <a:r>
-              <a:rPr sz="1600"/>
-              <a:t>01　Executive Summary</a:t>
+            <a:pPr>
+              <a:spcAft>
+                <a:spcPts val="1000"/>
+              </a:spcAft>
+            </a:pPr>
+            <a:r>
+              <a:rPr sz="1600" b="1">
+                <a:solidFill>
+                  <a:srgbClr val="C12026"/>
+                </a:solidFill>
+                <a:latin typeface="微軟正黑體"/>
+                <a:ea typeface="微軟正黑體"/>
+                <a:cs typeface="微軟正黑體"/>
+              </a:rPr>
+              <a:t>01　</a:t>
+            </a:r>
+            <a:r>
+              <a:rPr sz="1600" b="0">
+                <a:solidFill>
+                  <a:srgbClr val="1A1A1A"/>
+                </a:solidFill>
+                <a:latin typeface="微軟正黑體"/>
+                <a:ea typeface="微軟正黑體"/>
+                <a:cs typeface="微軟正黑體"/>
+              </a:rPr>
+              <a:t>Executive Summary</a:t>
             </a:r>
           </a:p>
           <a:p>
-            <a:pPr/>
-            <a:r>
-              <a:rPr sz="1600"/>
-              <a:t>02　市場整體概況</a:t>
+            <a:pPr>
+              <a:spcAft>
+                <a:spcPts val="1000"/>
+              </a:spcAft>
+            </a:pPr>
+            <a:r>
+              <a:rPr sz="1600" b="1">
+                <a:solidFill>
+                  <a:srgbClr val="C12026"/>
+                </a:solidFill>
+                <a:latin typeface="微軟正黑體"/>
+                <a:ea typeface="微軟正黑體"/>
+                <a:cs typeface="微軟正黑體"/>
+              </a:rPr>
+              <a:t>02　</a:t>
+            </a:r>
+            <a:r>
+              <a:rPr sz="1600" b="0">
+                <a:solidFill>
+                  <a:srgbClr val="1A1A1A"/>
+                </a:solidFill>
+                <a:latin typeface="微軟正黑體"/>
+                <a:ea typeface="微軟正黑體"/>
+                <a:cs typeface="微軟正黑體"/>
+              </a:rPr>
+              <a:t>市場整體概況</a:t>
             </a:r>
           </a:p>
           <a:p>
-            <a:pPr/>
-            <a:r>
-              <a:rPr sz="1600"/>
-              <a:t>03　同業成長及競爭分析</a:t>
+            <a:pPr>
+              <a:spcAft>
+                <a:spcPts val="1000"/>
+              </a:spcAft>
+            </a:pPr>
+            <a:r>
+              <a:rPr sz="1600" b="1">
+                <a:solidFill>
+                  <a:srgbClr val="C12026"/>
+                </a:solidFill>
+                <a:latin typeface="微軟正黑體"/>
+                <a:ea typeface="微軟正黑體"/>
+                <a:cs typeface="微軟正黑體"/>
+              </a:rPr>
+              <a:t>03　</a:t>
+            </a:r>
+            <a:r>
+              <a:rPr sz="1600" b="0">
+                <a:solidFill>
+                  <a:srgbClr val="1A1A1A"/>
+                </a:solidFill>
+                <a:latin typeface="微軟正黑體"/>
+                <a:ea typeface="微軟正黑體"/>
+                <a:cs typeface="微軟正黑體"/>
+              </a:rPr>
+              <a:t>同業成長及競爭分析</a:t>
             </a:r>
           </a:p>
           <a:p>
-            <a:pPr/>
-            <a:r>
-              <a:rPr sz="1600"/>
-              <a:t>04　客戶活躍度</a:t>
+            <a:pPr>
+              <a:spcAft>
+                <a:spcPts val="1000"/>
+              </a:spcAft>
+            </a:pPr>
+            <a:r>
+              <a:rPr sz="1600" b="1">
+                <a:solidFill>
+                  <a:srgbClr val="C12026"/>
+                </a:solidFill>
+                <a:latin typeface="微軟正黑體"/>
+                <a:ea typeface="微軟正黑體"/>
+                <a:cs typeface="微軟正黑體"/>
+              </a:rPr>
+              <a:t>04　</a:t>
+            </a:r>
+            <a:r>
+              <a:rPr sz="1600" b="0">
+                <a:solidFill>
+                  <a:srgbClr val="1A1A1A"/>
+                </a:solidFill>
+                <a:latin typeface="微軟正黑體"/>
+                <a:ea typeface="微軟正黑體"/>
+                <a:cs typeface="微軟正黑體"/>
+              </a:rPr>
+              <a:t>客戶活躍度</a:t>
             </a:r>
           </a:p>
           <a:p>
-            <a:pPr/>
-            <a:r>
-              <a:rPr sz="1600"/>
-              <a:t>05　獲利能力</a:t>
+            <a:pPr>
+              <a:spcAft>
+                <a:spcPts val="1000"/>
+              </a:spcAft>
+            </a:pPr>
+            <a:r>
+              <a:rPr sz="1600" b="1">
+                <a:solidFill>
+                  <a:srgbClr val="C12026"/>
+                </a:solidFill>
+                <a:latin typeface="微軟正黑體"/>
+                <a:ea typeface="微軟正黑體"/>
+                <a:cs typeface="微軟正黑體"/>
+              </a:rPr>
+              <a:t>05　</a:t>
+            </a:r>
+            <a:r>
+              <a:rPr sz="1600" b="0">
+                <a:solidFill>
+                  <a:srgbClr val="1A1A1A"/>
+                </a:solidFill>
+                <a:latin typeface="微軟正黑體"/>
+                <a:ea typeface="微軟正黑體"/>
+                <a:cs typeface="微軟正黑體"/>
+              </a:rPr>
+              <a:t>獲利能力</a:t>
             </a:r>
           </a:p>
           <a:p>
-            <a:pPr/>
-            <a:r>
-              <a:rPr sz="1600"/>
-              <a:t>06　風險與警訊</a:t>
+            <a:pPr>
+              <a:spcAft>
+                <a:spcPts val="1000"/>
+              </a:spcAft>
+            </a:pPr>
+            <a:r>
+              <a:rPr sz="1600" b="1">
+                <a:solidFill>
+                  <a:srgbClr val="C12026"/>
+                </a:solidFill>
+                <a:latin typeface="微軟正黑體"/>
+                <a:ea typeface="微軟正黑體"/>
+                <a:cs typeface="微軟正黑體"/>
+              </a:rPr>
+              <a:t>06　</a:t>
+            </a:r>
+            <a:r>
+              <a:rPr sz="1600" b="0">
+                <a:solidFill>
+                  <a:srgbClr val="1A1A1A"/>
+                </a:solidFill>
+                <a:latin typeface="微軟正黑體"/>
+                <a:ea typeface="微軟正黑體"/>
+                <a:cs typeface="微軟正黑體"/>
+              </a:rPr>
+              <a:t>風險與警訊</a:t>
             </a:r>
           </a:p>
           <a:p>
-            <a:pPr/>
-            <a:r>
-              <a:rPr sz="1600"/>
-              <a:t>07　未來趨勢推測</a:t>
+            <a:pPr>
+              <a:spcAft>
+                <a:spcPts val="1000"/>
+              </a:spcAft>
+            </a:pPr>
+            <a:r>
+              <a:rPr sz="1600" b="1">
+                <a:solidFill>
+                  <a:srgbClr val="C12026"/>
+                </a:solidFill>
+                <a:latin typeface="微軟正黑體"/>
+                <a:ea typeface="微軟正黑體"/>
+                <a:cs typeface="微軟正黑體"/>
+              </a:rPr>
+              <a:t>07　</a:t>
+            </a:r>
+            <a:r>
+              <a:rPr sz="1600" b="0">
+                <a:solidFill>
+                  <a:srgbClr val="1A1A1A"/>
+                </a:solidFill>
+                <a:latin typeface="微軟正黑體"/>
+                <a:ea typeface="微軟正黑體"/>
+                <a:cs typeface="微軟正黑體"/>
+              </a:rPr>
+              <a:t>未來趨勢推測</a:t>
             </a:r>
           </a:p>
           <a:p>
-            <a:pPr/>
-            <a:r>
-              <a:rPr sz="1600"/>
-              <a:t>08　對台新的策略建議</a:t>
+            <a:pPr>
+              <a:spcAft>
+                <a:spcPts val="1000"/>
+              </a:spcAft>
+            </a:pPr>
+            <a:r>
+              <a:rPr sz="1600" b="1">
+                <a:solidFill>
+                  <a:srgbClr val="C12026"/>
+                </a:solidFill>
+                <a:latin typeface="微軟正黑體"/>
+                <a:ea typeface="微軟正黑體"/>
+                <a:cs typeface="微軟正黑體"/>
+              </a:rPr>
+              <a:t>08　</a:t>
+            </a:r>
+            <a:r>
+              <a:rPr sz="1600" b="0">
+                <a:solidFill>
+                  <a:srgbClr val="1A1A1A"/>
+                </a:solidFill>
+                <a:latin typeface="微軟正黑體"/>
+                <a:ea typeface="微軟正黑體"/>
+                <a:cs typeface="微軟正黑體"/>
+              </a:rPr>
+              <a:t>對台新的策略建議</a:t>
+            </a:r>
+          </a:p>
+          <a:p>
+            <a:pPr>
+              <a:spcAft>
+                <a:spcPts val="1000"/>
+              </a:spcAft>
+            </a:pPr>
+            <a:r>
+              <a:rPr sz="1600" b="1">
+                <a:solidFill>
+                  <a:srgbClr val="C12026"/>
+                </a:solidFill>
+                <a:latin typeface="微軟正黑體"/>
+                <a:ea typeface="微軟正黑體"/>
+                <a:cs typeface="微軟正黑體"/>
+              </a:rPr>
+              <a:t>09　</a:t>
+            </a:r>
+            <a:r>
+              <a:rPr sz="1600" b="0">
+                <a:solidFill>
+                  <a:srgbClr val="1A1A1A"/>
+                </a:solidFill>
+                <a:latin typeface="微軟正黑體"/>
+                <a:ea typeface="微軟正黑體"/>
+                <a:cs typeface="微軟正黑體"/>
+              </a:rPr>
+              <a:t>結論與後續行動</a:t>
             </a:r>
           </a:p>
         </p:txBody>
@@ -7991,7 +10146,16 @@
           <a:bodyPr/>
           <a:lstStyle/>
           <a:p>
-            <a:r>
+            <a:pPr algn="l"/>
+            <a:r>
+              <a:rPr sz="2200" b="0">
+                <a:solidFill>
+                  <a:srgbClr val="1A1A1A"/>
+                </a:solidFill>
+                <a:latin typeface="微軟正黑體"/>
+                <a:ea typeface="微軟正黑體"/>
+                <a:cs typeface="微軟正黑體"/>
+              </a:rPr>
               <a:t>目錄</a:t>
             </a:r>
           </a:p>
@@ -8006,6 +10170,395 @@
 </file>
 
 <file path=ppt/slides/slide20.xml><?xml version="1.0" encoding="utf-8"?>
+<p:sld xmlns:a="http://schemas.openxmlformats.org/drawingml/2006/main" xmlns:p="http://schemas.openxmlformats.org/presentationml/2006/main" xmlns:r="http://schemas.openxmlformats.org/officeDocument/2006/relationships">
+  <p:cSld>
+    <p:spTree>
+      <p:nvGrpSpPr>
+        <p:cNvPr id="1" name=""/>
+        <p:cNvGrpSpPr/>
+        <p:nvPr/>
+      </p:nvGrpSpPr>
+      <p:grpSpPr/>
+      <p:sp>
+        <p:nvSpPr>
+          <p:cNvPr id="2" name="Text Placeholder 1"/>
+          <p:cNvSpPr>
+            <a:spLocks noGrp="1"/>
+          </p:cNvSpPr>
+          <p:nvPr>
+            <p:ph type="body" idx="1"/>
+          </p:nvPr>
+        </p:nvSpPr>
+        <p:spPr>
+          <a:xfrm>
+            <a:off x="368595" y="1247553"/>
+            <a:ext cx="11242500" cy="4880100"/>
+          </a:xfrm>
+        </p:spPr>
+        <p:txBody>
+          <a:bodyPr wrap="square"/>
+          <a:lstStyle/>
+          <a:p>
+            <a:pPr>
+              <a:spcAft>
+                <a:spcPts val="600"/>
+              </a:spcAft>
+            </a:pPr>
+            <a:r>
+              <a:rPr sz="1100" b="1">
+                <a:solidFill>
+                  <a:srgbClr val="C12026"/>
+                </a:solidFill>
+                <a:latin typeface="微軟正黑體"/>
+                <a:ea typeface="微軟正黑體"/>
+                <a:cs typeface="微軟正黑體"/>
+              </a:rPr>
+              <a:t>▸ Executive Summary｜</a:t>
+            </a:r>
+            <a:r>
+              <a:rPr sz="1100" b="0">
+                <a:solidFill>
+                  <a:srgbClr val="4D4D4D"/>
+                </a:solidFill>
+                <a:latin typeface="微軟正黑體"/>
+                <a:ea typeface="微軟正黑體"/>
+                <a:cs typeface="微軟正黑體"/>
+              </a:rPr>
+              <a:t>循環信用餘額 Top 10呈現明顯的業者集中態勢，規模差距短期內難以收斂</a:t>
+            </a:r>
+            <a:r>
+              <a:rPr sz="1000" b="0">
+                <a:solidFill>
+                  <a:srgbClr val="666666"/>
+                </a:solidFill>
+                <a:latin typeface="微軟正黑體"/>
+                <a:ea typeface="微軟正黑體"/>
+                <a:cs typeface="微軟正黑體"/>
+              </a:rPr>
+              <a:t>（P.4）</a:t>
+            </a:r>
+          </a:p>
+          <a:p>
+            <a:pPr>
+              <a:spcAft>
+                <a:spcPts val="600"/>
+              </a:spcAft>
+            </a:pPr>
+            <a:r>
+              <a:rPr sz="1100" b="1">
+                <a:solidFill>
+                  <a:srgbClr val="C12026"/>
+                </a:solidFill>
+                <a:latin typeface="微軟正黑體"/>
+                <a:ea typeface="微軟正黑體"/>
+                <a:cs typeface="微軟正黑體"/>
+              </a:rPr>
+              <a:t>▸ 市場整體概況｜</a:t>
+            </a:r>
+            <a:r>
+              <a:rPr sz="1100" b="0">
+                <a:solidFill>
+                  <a:srgbClr val="4D4D4D"/>
+                </a:solidFill>
+                <a:latin typeface="微軟正黑體"/>
+                <a:ea typeface="微軟正黑體"/>
+                <a:cs typeface="微軟正黑體"/>
+              </a:rPr>
+              <a:t>市場整體（各期）呈現明顯的業者集中態勢，規模差距短期內難以收斂</a:t>
+            </a:r>
+            <a:r>
+              <a:rPr sz="1000" b="0">
+                <a:solidFill>
+                  <a:srgbClr val="666666"/>
+                </a:solidFill>
+                <a:latin typeface="微軟正黑體"/>
+                <a:ea typeface="微軟正黑體"/>
+                <a:cs typeface="微軟正黑體"/>
+              </a:rPr>
+              <a:t>（P.6）</a:t>
+            </a:r>
+          </a:p>
+          <a:p>
+            <a:pPr>
+              <a:spcAft>
+                <a:spcPts val="600"/>
+              </a:spcAft>
+            </a:pPr>
+            <a:r>
+              <a:rPr sz="1100" b="1">
+                <a:solidFill>
+                  <a:srgbClr val="C12026"/>
+                </a:solidFill>
+                <a:latin typeface="微軟正黑體"/>
+                <a:ea typeface="微軟正黑體"/>
+                <a:cs typeface="微軟正黑體"/>
+              </a:rPr>
+              <a:t>▸ 同業成長及競爭分析｜</a:t>
+            </a:r>
+            <a:r>
+              <a:rPr sz="1100" b="0">
+                <a:solidFill>
+                  <a:srgbClr val="4D4D4D"/>
+                </a:solidFill>
+                <a:latin typeface="微軟正黑體"/>
+                <a:ea typeface="微軟正黑體"/>
+                <a:cs typeface="微軟正黑體"/>
+              </a:rPr>
+              <a:t>循環信用餘額 占比 Top 10呈現明顯的業者集中態勢，規模差距短期內難以收斂</a:t>
+            </a:r>
+            <a:r>
+              <a:rPr sz="1000" b="0">
+                <a:solidFill>
+                  <a:srgbClr val="666666"/>
+                </a:solidFill>
+                <a:latin typeface="微軟正黑體"/>
+                <a:ea typeface="微軟正黑體"/>
+                <a:cs typeface="微軟正黑體"/>
+              </a:rPr>
+              <a:t>（P.9）</a:t>
+            </a:r>
+          </a:p>
+          <a:p>
+            <a:pPr>
+              <a:spcAft>
+                <a:spcPts val="600"/>
+              </a:spcAft>
+            </a:pPr>
+            <a:r>
+              <a:rPr sz="1100" b="1">
+                <a:solidFill>
+                  <a:srgbClr val="C12026"/>
+                </a:solidFill>
+                <a:latin typeface="微軟正黑體"/>
+                <a:ea typeface="微軟正黑體"/>
+                <a:cs typeface="微軟正黑體"/>
+              </a:rPr>
+              <a:t>▸ 客戶活躍度｜</a:t>
+            </a:r>
+            <a:r>
+              <a:rPr sz="1100" b="0">
+                <a:solidFill>
+                  <a:srgbClr val="4D4D4D"/>
+                </a:solidFill>
+                <a:latin typeface="微軟正黑體"/>
+                <a:ea typeface="微軟正黑體"/>
+                <a:cs typeface="微軟正黑體"/>
+              </a:rPr>
+              <a:t>有效卡數 Top 10呈現明顯的業者集中態勢，規模差距短期內難以收斂</a:t>
+            </a:r>
+            <a:r>
+              <a:rPr sz="1000" b="0">
+                <a:solidFill>
+                  <a:srgbClr val="666666"/>
+                </a:solidFill>
+                <a:latin typeface="微軟正黑體"/>
+                <a:ea typeface="微軟正黑體"/>
+                <a:cs typeface="微軟正黑體"/>
+              </a:rPr>
+              <a:t>（P.11）</a:t>
+            </a:r>
+          </a:p>
+          <a:p>
+            <a:pPr>
+              <a:spcAft>
+                <a:spcPts val="600"/>
+              </a:spcAft>
+            </a:pPr>
+            <a:r>
+              <a:rPr sz="1100" b="1">
+                <a:solidFill>
+                  <a:srgbClr val="C12026"/>
+                </a:solidFill>
+                <a:latin typeface="微軟正黑體"/>
+                <a:ea typeface="微軟正黑體"/>
+                <a:cs typeface="微軟正黑體"/>
+              </a:rPr>
+              <a:t>▸ 獲利能力｜</a:t>
+            </a:r>
+            <a:r>
+              <a:rPr sz="1100" b="0">
+                <a:solidFill>
+                  <a:srgbClr val="4D4D4D"/>
+                </a:solidFill>
+                <a:latin typeface="微軟正黑體"/>
+                <a:ea typeface="微軟正黑體"/>
+                <a:cs typeface="微軟正黑體"/>
+              </a:rPr>
+              <a:t>未到期分期付款餘額 Top 10呈現明顯的業者集中態勢，規模差距短期內難以收斂</a:t>
+            </a:r>
+            <a:r>
+              <a:rPr sz="1000" b="0">
+                <a:solidFill>
+                  <a:srgbClr val="666666"/>
+                </a:solidFill>
+                <a:latin typeface="微軟正黑體"/>
+                <a:ea typeface="微軟正黑體"/>
+                <a:cs typeface="微軟正黑體"/>
+              </a:rPr>
+              <a:t>（P.13）</a:t>
+            </a:r>
+          </a:p>
+          <a:p>
+            <a:pPr>
+              <a:spcAft>
+                <a:spcPts val="600"/>
+              </a:spcAft>
+            </a:pPr>
+            <a:r>
+              <a:rPr sz="1100" b="1">
+                <a:solidFill>
+                  <a:srgbClr val="C12026"/>
+                </a:solidFill>
+                <a:latin typeface="微軟正黑體"/>
+                <a:ea typeface="微軟正黑體"/>
+                <a:cs typeface="微軟正黑體"/>
+              </a:rPr>
+              <a:t>▸ 風險與警訊｜</a:t>
+            </a:r>
+            <a:r>
+              <a:rPr sz="1100" b="0">
+                <a:solidFill>
+                  <a:srgbClr val="4D4D4D"/>
+                </a:solidFill>
+                <a:latin typeface="微軟正黑體"/>
+                <a:ea typeface="微軟正黑體"/>
+                <a:cs typeface="微軟正黑體"/>
+              </a:rPr>
+              <a:t>當月轉銷呆帳金額 Top 10呈現明顯的業者集中態勢，規模差距短期內難以收斂</a:t>
+            </a:r>
+            <a:r>
+              <a:rPr sz="1000" b="0">
+                <a:solidFill>
+                  <a:srgbClr val="666666"/>
+                </a:solidFill>
+                <a:latin typeface="微軟正黑體"/>
+                <a:ea typeface="微軟正黑體"/>
+                <a:cs typeface="微軟正黑體"/>
+              </a:rPr>
+              <a:t>（P.15）</a:t>
+            </a:r>
+          </a:p>
+          <a:p>
+            <a:pPr>
+              <a:spcAft>
+                <a:spcPts val="600"/>
+              </a:spcAft>
+            </a:pPr>
+            <a:r>
+              <a:rPr sz="1100" b="1">
+                <a:solidFill>
+                  <a:srgbClr val="C12026"/>
+                </a:solidFill>
+                <a:latin typeface="微軟正黑體"/>
+                <a:ea typeface="微軟正黑體"/>
+                <a:cs typeface="微軟正黑體"/>
+              </a:rPr>
+              <a:t>▸ 未來趨勢推測｜</a:t>
+            </a:r>
+            <a:r>
+              <a:rPr sz="1100" b="0">
+                <a:solidFill>
+                  <a:srgbClr val="4D4D4D"/>
+                </a:solidFill>
+                <a:latin typeface="微軟正黑體"/>
+                <a:ea typeface="微軟正黑體"/>
+                <a:cs typeface="微軟正黑體"/>
+              </a:rPr>
+              <a:t>市場整體（各期） 趨勢外推呈現明顯的業者集中態勢，規模差距短期內難以收斂</a:t>
+            </a:r>
+            <a:r>
+              <a:rPr sz="1000" b="0">
+                <a:solidFill>
+                  <a:srgbClr val="666666"/>
+                </a:solidFill>
+                <a:latin typeface="微軟正黑體"/>
+                <a:ea typeface="微軟正黑體"/>
+                <a:cs typeface="微軟正黑體"/>
+              </a:rPr>
+              <a:t>（P.17）</a:t>
+            </a:r>
+          </a:p>
+          <a:p>
+            <a:pPr>
+              <a:spcAft>
+                <a:spcPts val="600"/>
+              </a:spcAft>
+            </a:pPr>
+            <a:r>
+              <a:rPr sz="1100" b="1">
+                <a:solidFill>
+                  <a:srgbClr val="C12026"/>
+                </a:solidFill>
+                <a:latin typeface="微軟正黑體"/>
+                <a:ea typeface="微軟正黑體"/>
+                <a:cs typeface="微軟正黑體"/>
+              </a:rPr>
+              <a:t>▸ 對台新的策略建議｜</a:t>
+            </a:r>
+            <a:r>
+              <a:rPr sz="1100" b="0">
+                <a:solidFill>
+                  <a:srgbClr val="4D4D4D"/>
+                </a:solidFill>
+                <a:latin typeface="微軟正黑體"/>
+                <a:ea typeface="微軟正黑體"/>
+                <a:cs typeface="微軟正黑體"/>
+              </a:rPr>
+              <a:t>循環信用餘額 占比呈現明顯的業者集中態勢，規模差距短期內難以收斂</a:t>
+            </a:r>
+            <a:r>
+              <a:rPr sz="1000" b="0">
+                <a:solidFill>
+                  <a:srgbClr val="666666"/>
+                </a:solidFill>
+                <a:latin typeface="微軟正黑體"/>
+                <a:ea typeface="微軟正黑體"/>
+                <a:cs typeface="微軟正黑體"/>
+              </a:rPr>
+              <a:t>（P.19）</a:t>
+            </a:r>
+          </a:p>
+        </p:txBody>
+      </p:sp>
+      <p:sp>
+        <p:nvSpPr>
+          <p:cNvPr id="3" name="Title 2"/>
+          <p:cNvSpPr>
+            <a:spLocks noGrp="1"/>
+          </p:cNvSpPr>
+          <p:nvPr>
+            <p:ph type="title"/>
+          </p:nvPr>
+        </p:nvSpPr>
+        <p:spPr/>
+        <p:txBody>
+          <a:bodyPr/>
+          <a:lstStyle/>
+          <a:p>
+            <a:pPr algn="l"/>
+            <a:r>
+              <a:rPr sz="2200" b="0">
+                <a:solidFill>
+                  <a:srgbClr val="1A1A1A"/>
+                </a:solidFill>
+                <a:latin typeface="微軟正黑體"/>
+                <a:ea typeface="微軟正黑體"/>
+                <a:cs typeface="微軟正黑體"/>
+              </a:rPr>
+              <a:t>結論與後續行動</a:t>
+            </a:r>
+          </a:p>
+        </p:txBody>
+      </p:sp>
+    </p:spTree>
+  </p:cSld>
+  <p:clrMapOvr>
+    <a:masterClrMapping/>
+  </p:clrMapOvr>
+</p:sld>
+</file>
+
+<file path=ppt/slides/slide21.xml><?xml version="1.0" encoding="utf-8"?>
 <p:sld xmlns:a="http://schemas.openxmlformats.org/drawingml/2006/main" xmlns:p="http://schemas.openxmlformats.org/presentationml/2006/main" xmlns:r="http://schemas.openxmlformats.org/officeDocument/2006/relationships">
   <p:cSld>
     <p:spTree>
@@ -8031,6 +10584,14 @@
           <a:lstStyle/>
           <a:p>
             <a:r>
+              <a:rPr sz="3200" b="1">
+                <a:solidFill>
+                  <a:srgbClr val="4D4D4D"/>
+                </a:solidFill>
+                <a:latin typeface="微軟正黑體"/>
+                <a:ea typeface="微軟正黑體"/>
+                <a:cs typeface="微軟正黑體"/>
+              </a:rPr>
               <a:t>感謝聆聽</a:t>
             </a:r>
           </a:p>
@@ -8070,8 +10631,73 @@
           <a:lstStyle/>
           <a:p>
             <a:r>
+              <a:rPr sz="1400" b="0">
+                <a:solidFill>
+                  <a:srgbClr val="C12026"/>
+                </a:solidFill>
+                <a:latin typeface="微軟正黑體"/>
+                <a:ea typeface="微軟正黑體"/>
+                <a:cs typeface="微軟正黑體"/>
+              </a:rPr>
+              <a:t>CHAPTER 01</a:t>
+            </a:r>
+          </a:p>
+          <a:p>
+            <a:r>
+              <a:rPr sz="3200" b="1">
+                <a:solidFill>
+                  <a:srgbClr val="4D4D4D"/>
+                </a:solidFill>
+                <a:latin typeface="微軟正黑體"/>
+                <a:ea typeface="微軟正黑體"/>
+                <a:cs typeface="微軟正黑體"/>
+              </a:rPr>
               <a:t>Executive Summary</a:t>
             </a:r>
+          </a:p>
+        </p:txBody>
+      </p:sp>
+      <p:sp>
+        <p:nvSpPr>
+          <p:cNvPr id="3" name="Rectangle 2"/>
+          <p:cNvSpPr/>
+          <p:nvPr/>
+        </p:nvSpPr>
+        <p:spPr>
+          <a:xfrm>
+            <a:off x="831851" y="5737075"/>
+            <a:ext cx="1905000" cy="28575"/>
+          </a:xfrm>
+          <a:prstGeom prst="rect">
+            <a:avLst/>
+          </a:prstGeom>
+          <a:solidFill>
+            <a:srgbClr val="C12026"/>
+          </a:solidFill>
+          <a:ln>
+            <a:noFill/>
+          </a:ln>
+          <a:effectLst/>
+        </p:spPr>
+        <p:style>
+          <a:lnRef idx="1">
+            <a:schemeClr val="accent1"/>
+          </a:lnRef>
+          <a:fillRef idx="3">
+            <a:schemeClr val="accent1"/>
+          </a:fillRef>
+          <a:effectRef idx="2">
+            <a:schemeClr val="accent1"/>
+          </a:effectRef>
+          <a:fontRef idx="minor">
+            <a:schemeClr val="lt1"/>
+          </a:fontRef>
+        </p:style>
+        <p:txBody>
+          <a:bodyPr rtlCol="0" anchor="ctr"/>
+          <a:lstStyle/>
+          <a:p>
+            <a:pPr algn="ctr"/>
           </a:p>
         </p:txBody>
       </p:sp>
@@ -8105,32 +10731,200 @@
         </p:nvSpPr>
         <p:spPr>
           <a:xfrm>
-            <a:off x="7205535" y="1247553"/>
-            <a:ext cx="4405560" cy="4880100"/>
+            <a:off x="7205535" y="1854753"/>
+            <a:ext cx="4405560" cy="4272900"/>
           </a:xfrm>
         </p:spPr>
         <p:txBody>
-          <a:bodyPr wrap="square"/>
+          <a:bodyPr wrap="square">
+            <a:normAutofit/>
+          </a:bodyPr>
           <a:lstStyle/>
           <a:p>
-            <a:pPr/>
-            <a:r>
-              <a:rPr b="1" sz="1600"/>
-              <a:t>循環信用餘額 Top 10呈現明顯的業者集中態勢</a:t>
+            <a:pPr>
+              <a:spcAft>
+                <a:spcPts val="800"/>
+              </a:spcAft>
+            </a:pPr>
+            <a:r>
+              <a:rPr sz="1100" b="1">
+                <a:solidFill>
+                  <a:srgbClr val="C12026"/>
+                </a:solidFill>
+                <a:latin typeface="微軟正黑體"/>
+                <a:ea typeface="微軟正黑體"/>
+                <a:cs typeface="微軟正黑體"/>
+              </a:rPr>
+              <a:t>▸ </a:t>
+            </a:r>
+            <a:r>
+              <a:rPr sz="1100" b="0">
+                <a:solidFill>
+                  <a:srgbClr val="4D4D4D"/>
+                </a:solidFill>
+                <a:latin typeface="微軟正黑體"/>
+                <a:ea typeface="微軟正黑體"/>
+                <a:cs typeface="微軟正黑體"/>
+              </a:rPr>
+              <a:t>領先者 </a:t>
+            </a:r>
+            <a:r>
+              <a:rPr sz="1100" b="1">
+                <a:solidFill>
+                  <a:srgbClr val="1A1A1A"/>
+                </a:solidFill>
+                <a:highlight>
+                  <a:srgbClr val="FFFF00"/>
+                </a:highlight>
+                <a:latin typeface="微軟正黑體"/>
+                <a:ea typeface="微軟正黑體"/>
+                <a:cs typeface="微軟正黑體"/>
+              </a:rPr>
+              <a:t>國泰世華商業銀行</a:t>
+            </a:r>
+            <a:r>
+              <a:rPr sz="1100" b="0">
+                <a:solidFill>
+                  <a:srgbClr val="4D4D4D"/>
+                </a:solidFill>
+                <a:latin typeface="微軟正黑體"/>
+                <a:ea typeface="微軟正黑體"/>
+                <a:cs typeface="微軟正黑體"/>
+              </a:rPr>
+              <a:t> 達 </a:t>
+            </a:r>
+            <a:r>
+              <a:rPr sz="1100" b="1">
+                <a:solidFill>
+                  <a:srgbClr val="1A1A1A"/>
+                </a:solidFill>
+                <a:highlight>
+                  <a:srgbClr val="FFFF00"/>
+                </a:highlight>
+                <a:latin typeface="微軟正黑體"/>
+                <a:ea typeface="微軟正黑體"/>
+                <a:cs typeface="微軟正黑體"/>
+              </a:rPr>
+              <a:t>22,171,305</a:t>
+            </a:r>
+            <a:r>
+              <a:rPr sz="1100" b="0">
+                <a:solidFill>
+                  <a:srgbClr val="4D4D4D"/>
+                </a:solidFill>
+                <a:latin typeface="微軟正黑體"/>
+                <a:ea typeface="微軟正黑體"/>
+                <a:cs typeface="微軟正黑體"/>
+              </a:rPr>
+              <a:t>，明顯拉開與其餘業者的距離，反映規模效應仍在累積</a:t>
             </a:r>
           </a:p>
           <a:p>
-            <a:pPr lvl="1"/>
-            <a:r>
-              <a:rPr sz="1200"/>
-              <a:t>領先者 國泰世華商業銀行 達 22,171,305</a:t>
+            <a:pPr>
+              <a:spcAft>
+                <a:spcPts val="800"/>
+              </a:spcAft>
+            </a:pPr>
+            <a:r>
+              <a:rPr sz="1100" b="1">
+                <a:solidFill>
+                  <a:srgbClr val="C12026"/>
+                </a:solidFill>
+                <a:latin typeface="微軟正黑體"/>
+                <a:ea typeface="微軟正黑體"/>
+                <a:cs typeface="微軟正黑體"/>
+              </a:rPr>
+              <a:t>▸ </a:t>
+            </a:r>
+            <a:r>
+              <a:rPr sz="1100" b="0">
+                <a:solidFill>
+                  <a:srgbClr val="4D4D4D"/>
+                </a:solidFill>
+                <a:latin typeface="微軟正黑體"/>
+                <a:ea typeface="微軟正黑體"/>
+                <a:cs typeface="微軟正黑體"/>
+              </a:rPr>
+              <a:t>末位業者僅 </a:t>
+            </a:r>
+            <a:r>
+              <a:rPr sz="1100" b="1">
+                <a:solidFill>
+                  <a:srgbClr val="1A1A1A"/>
+                </a:solidFill>
+                <a:highlight>
+                  <a:srgbClr val="FFFF00"/>
+                </a:highlight>
+                <a:latin typeface="微軟正黑體"/>
+                <a:ea typeface="微軟正黑體"/>
+                <a:cs typeface="微軟正黑體"/>
+              </a:rPr>
+              <a:t>1,711,263</a:t>
+            </a:r>
+            <a:r>
+              <a:rPr sz="1100" b="0">
+                <a:solidFill>
+                  <a:srgbClr val="4D4D4D"/>
+                </a:solidFill>
+                <a:latin typeface="微軟正黑體"/>
+                <a:ea typeface="微軟正黑體"/>
+                <a:cs typeface="微軟正黑體"/>
+              </a:rPr>
+              <a:t>，與領先者之間的落差顯示中小型業者在此指標上缺乏可持續的規模優勢</a:t>
             </a:r>
           </a:p>
           <a:p>
-            <a:pPr lvl="1"/>
-            <a:r>
-              <a:rPr sz="1200"/>
-              <a:t>末位者僅 1,711,263</a:t>
+            <a:pPr>
+              <a:spcAft>
+                <a:spcPts val="800"/>
+              </a:spcAft>
+            </a:pPr>
+            <a:r>
+              <a:rPr sz="1100" b="1">
+                <a:solidFill>
+                  <a:srgbClr val="C12026"/>
+                </a:solidFill>
+                <a:latin typeface="微軟正黑體"/>
+                <a:ea typeface="微軟正黑體"/>
+                <a:cs typeface="微軟正黑體"/>
+              </a:rPr>
+              <a:t>▸ </a:t>
+            </a:r>
+            <a:r>
+              <a:rPr sz="1100" b="0">
+                <a:solidFill>
+                  <a:srgbClr val="4D4D4D"/>
+                </a:solidFill>
+                <a:latin typeface="微軟正黑體"/>
+                <a:ea typeface="微軟正黑體"/>
+                <a:cs typeface="微軟正黑體"/>
+              </a:rPr>
+              <a:t>全體平均為 </a:t>
+            </a:r>
+            <a:r>
+              <a:rPr sz="1100" b="1">
+                <a:solidFill>
+                  <a:srgbClr val="1A1A1A"/>
+                </a:solidFill>
+                <a:highlight>
+                  <a:srgbClr val="FFFF00"/>
+                </a:highlight>
+                <a:latin typeface="微軟正黑體"/>
+                <a:ea typeface="微軟正黑體"/>
+                <a:cs typeface="微軟正黑體"/>
+              </a:rPr>
+              <a:t>10,512,621.8</a:t>
+            </a:r>
+            <a:r>
+              <a:rPr sz="1100" b="0">
+                <a:solidFill>
+                  <a:srgbClr val="4D4D4D"/>
+                </a:solidFill>
+                <a:latin typeface="微軟正黑體"/>
+                <a:ea typeface="微軟正黑體"/>
+                <a:cs typeface="微軟正黑體"/>
+              </a:rPr>
+              <a:t>，位於平均之下的業者需重新檢視資源配置是否與市場競爭強度相稱</a:t>
             </a:r>
           </a:p>
         </p:txBody>
@@ -8150,23 +10944,142 @@
           <a:bodyPr/>
           <a:lstStyle/>
           <a:p>
-            <a:r>
+            <a:pPr algn="l"/>
+            <a:r>
+              <a:rPr sz="2200" b="0">
+                <a:solidFill>
+                  <a:srgbClr val="1A1A1A"/>
+                </a:solidFill>
+                <a:latin typeface="微軟正黑體"/>
+                <a:ea typeface="微軟正黑體"/>
+                <a:cs typeface="微軟正黑體"/>
+              </a:rPr>
               <a:t>關鍵指標總覽</a:t>
+            </a:r>
+          </a:p>
+        </p:txBody>
+      </p:sp>
+      <p:sp>
+        <p:nvSpPr>
+          <p:cNvPr id="4" name="Rectangle 3"/>
+          <p:cNvSpPr/>
+          <p:nvPr/>
+        </p:nvSpPr>
+        <p:spPr>
+          <a:xfrm>
+            <a:off x="368595" y="1247553"/>
+            <a:ext cx="57150" cy="457200"/>
+          </a:xfrm>
+          <a:prstGeom prst="rect">
+            <a:avLst/>
+          </a:prstGeom>
+          <a:solidFill>
+            <a:srgbClr val="FFC000"/>
+          </a:solidFill>
+          <a:ln>
+            <a:noFill/>
+          </a:ln>
+          <a:effectLst/>
+        </p:spPr>
+        <p:style>
+          <a:lnRef idx="1">
+            <a:schemeClr val="accent1"/>
+          </a:lnRef>
+          <a:fillRef idx="3">
+            <a:schemeClr val="accent1"/>
+          </a:fillRef>
+          <a:effectRef idx="2">
+            <a:schemeClr val="accent1"/>
+          </a:effectRef>
+          <a:fontRef idx="minor">
+            <a:schemeClr val="lt1"/>
+          </a:fontRef>
+        </p:style>
+        <p:txBody>
+          <a:bodyPr rtlCol="0" anchor="ctr"/>
+          <a:lstStyle/>
+          <a:p>
+            <a:pPr algn="ctr"/>
+          </a:p>
+        </p:txBody>
+      </p:sp>
+      <p:sp>
+        <p:nvSpPr>
+          <p:cNvPr id="5" name="Rectangle 4"/>
+          <p:cNvSpPr/>
+          <p:nvPr/>
+        </p:nvSpPr>
+        <p:spPr>
+          <a:xfrm>
+            <a:off x="425745" y="1247553"/>
+            <a:ext cx="11185350" cy="457200"/>
+          </a:xfrm>
+          <a:prstGeom prst="rect">
+            <a:avLst/>
+          </a:prstGeom>
+          <a:solidFill>
+            <a:srgbClr val="FFF8D6"/>
+          </a:solidFill>
+          <a:ln>
+            <a:noFill/>
+          </a:ln>
+          <a:effectLst/>
+        </p:spPr>
+        <p:style>
+          <a:lnRef idx="1">
+            <a:schemeClr val="accent1"/>
+          </a:lnRef>
+          <a:fillRef idx="3">
+            <a:schemeClr val="accent1"/>
+          </a:fillRef>
+          <a:effectRef idx="2">
+            <a:schemeClr val="accent1"/>
+          </a:effectRef>
+          <a:fontRef idx="minor">
+            <a:schemeClr val="lt1"/>
+          </a:fontRef>
+        </p:style>
+        <p:txBody>
+          <a:bodyPr rtlCol="0" anchor="ctr" wrap="square" lIns="175260"/>
+          <a:lstStyle/>
+          <a:p>
+            <a:pPr algn="l"/>
+            <a:r>
+              <a:rPr sz="1300" b="1">
+                <a:solidFill>
+                  <a:srgbClr val="C12026"/>
+                </a:solidFill>
+                <a:latin typeface="微軟正黑體"/>
+                <a:ea typeface="微軟正黑體"/>
+                <a:cs typeface="微軟正黑體"/>
+              </a:rPr>
+              <a:t>◆ </a:t>
+            </a:r>
+            <a:r>
+              <a:rPr sz="1300" b="1">
+                <a:solidFill>
+                  <a:srgbClr val="1A1A1A"/>
+                </a:solidFill>
+                <a:latin typeface="微軟正黑體"/>
+                <a:ea typeface="微軟正黑體"/>
+                <a:cs typeface="微軟正黑體"/>
+              </a:rPr>
+              <a:t>循環信用餘額 Top 10呈現明顯的業者集中態勢，規模差距短期內難以收斂</a:t>
             </a:r>
           </a:p>
         </p:txBody>
       </p:sp>
       <p:graphicFrame>
         <p:nvGraphicFramePr>
-          <p:cNvPr id="4" name="Table 3"/>
+          <p:cNvPr id="6" name="Table 5"/>
           <p:cNvGraphicFramePr>
             <a:graphicFrameLocks noGrp="1"/>
           </p:cNvGraphicFramePr>
           <p:nvPr/>
         </p:nvGraphicFramePr>
         <p:xfrm>
-          <a:off x="368595" y="1247553"/>
-          <a:ext cx="6608340" cy="4880100"/>
+          <a:off x="368595" y="1854753"/>
+          <a:ext cx="6608340" cy="4272900"/>
         </p:xfrm>
         <a:graphic>
           <a:graphicData uri="http://schemas.openxmlformats.org/drawingml/2006/table">
@@ -8183,7 +11096,7 @@
                 <a:gridCol w="944048"/>
                 <a:gridCol w="944052"/>
               </a:tblGrid>
-              <a:tr h="443645">
+              <a:tr h="388445">
                 <a:tc>
                   <a:txBody>
                     <a:bodyPr/>
@@ -8332,7 +11245,7 @@
                   </a:tcPr>
                 </a:tc>
               </a:tr>
-              <a:tr h="443645">
+              <a:tr h="388445">
                 <a:tc>
                   <a:txBody>
                     <a:bodyPr/>
@@ -8425,7 +11338,7 @@
                   <a:tcPr/>
                 </a:tc>
               </a:tr>
-              <a:tr h="443645">
+              <a:tr h="388445">
                 <a:tc>
                   <a:txBody>
                     <a:bodyPr/>
@@ -8518,7 +11431,7 @@
                   <a:tcPr/>
                 </a:tc>
               </a:tr>
-              <a:tr h="443645">
+              <a:tr h="388445">
                 <a:tc>
                   <a:txBody>
                     <a:bodyPr/>
@@ -8611,7 +11524,7 @@
                   <a:tcPr/>
                 </a:tc>
               </a:tr>
-              <a:tr h="443645">
+              <a:tr h="388445">
                 <a:tc>
                   <a:txBody>
                     <a:bodyPr/>
@@ -8704,7 +11617,7 @@
                   <a:tcPr/>
                 </a:tc>
               </a:tr>
-              <a:tr h="443645">
+              <a:tr h="388445">
                 <a:tc>
                   <a:txBody>
                     <a:bodyPr/>
@@ -8797,7 +11710,7 @@
                   <a:tcPr/>
                 </a:tc>
               </a:tr>
-              <a:tr h="443645">
+              <a:tr h="388445">
                 <a:tc>
                   <a:txBody>
                     <a:bodyPr/>
@@ -8890,7 +11803,7 @@
                   <a:tcPr/>
                 </a:tc>
               </a:tr>
-              <a:tr h="443645">
+              <a:tr h="388445">
                 <a:tc>
                   <a:txBody>
                     <a:bodyPr/>
@@ -8983,7 +11896,7 @@
                   <a:tcPr/>
                 </a:tc>
               </a:tr>
-              <a:tr h="443645">
+              <a:tr h="388445">
                 <a:tc>
                   <a:txBody>
                     <a:bodyPr/>
@@ -9076,7 +11989,7 @@
                   <a:tcPr/>
                 </a:tc>
               </a:tr>
-              <a:tr h="443645">
+              <a:tr h="388445">
                 <a:tc>
                   <a:txBody>
                     <a:bodyPr/>
@@ -9169,7 +12082,7 @@
                   <a:tcPr/>
                 </a:tc>
               </a:tr>
-              <a:tr h="443650">
+              <a:tr h="388450">
                 <a:tc>
                   <a:txBody>
                     <a:bodyPr/>
@@ -9266,6 +12179,42 @@
           </a:graphicData>
         </a:graphic>
       </p:graphicFrame>
+      <p:sp>
+        <p:nvSpPr>
+          <p:cNvPr id="7" name="TextBox 6"/>
+          <p:cNvSpPr txBox="1"/>
+          <p:nvPr/>
+        </p:nvSpPr>
+        <p:spPr>
+          <a:xfrm>
+            <a:off x="368595" y="6150000"/>
+            <a:ext cx="11242500" cy="250000"/>
+          </a:xfrm>
+          <a:prstGeom prst="rect">
+            <a:avLst/>
+          </a:prstGeom>
+          <a:noFill/>
+        </p:spPr>
+        <p:txBody>
+          <a:bodyPr wrap="none">
+            <a:spAutoFit/>
+          </a:bodyPr>
+          <a:lstStyle/>
+          <a:p>
+            <a:r>
+              <a:rPr sz="1000" b="0">
+                <a:solidFill>
+                  <a:srgbClr val="666666"/>
+                </a:solidFill>
+                <a:latin typeface="微軟正黑體"/>
+                <a:ea typeface="微軟正黑體"/>
+                <a:cs typeface="微軟正黑體"/>
+              </a:rPr>
+              <a:t>本表數值與隨附 Excel 稽核檔逐格一致</a:t>
+            </a:r>
+          </a:p>
+        </p:txBody>
+      </p:sp>
     </p:spTree>
   </p:cSld>
   <p:clrMapOvr>
@@ -9300,8 +12249,73 @@
           <a:lstStyle/>
           <a:p>
             <a:r>
+              <a:rPr sz="1400" b="0">
+                <a:solidFill>
+                  <a:srgbClr val="C12026"/>
+                </a:solidFill>
+                <a:latin typeface="微軟正黑體"/>
+                <a:ea typeface="微軟正黑體"/>
+                <a:cs typeface="微軟正黑體"/>
+              </a:rPr>
+              <a:t>CHAPTER 02</a:t>
+            </a:r>
+          </a:p>
+          <a:p>
+            <a:r>
+              <a:rPr sz="3200" b="1">
+                <a:solidFill>
+                  <a:srgbClr val="4D4D4D"/>
+                </a:solidFill>
+                <a:latin typeface="微軟正黑體"/>
+                <a:ea typeface="微軟正黑體"/>
+                <a:cs typeface="微軟正黑體"/>
+              </a:rPr>
               <a:t>市場整體概況</a:t>
             </a:r>
+          </a:p>
+        </p:txBody>
+      </p:sp>
+      <p:sp>
+        <p:nvSpPr>
+          <p:cNvPr id="3" name="Rectangle 2"/>
+          <p:cNvSpPr/>
+          <p:nvPr/>
+        </p:nvSpPr>
+        <p:spPr>
+          <a:xfrm>
+            <a:off x="831851" y="5737075"/>
+            <a:ext cx="1905000" cy="28575"/>
+          </a:xfrm>
+          <a:prstGeom prst="rect">
+            <a:avLst/>
+          </a:prstGeom>
+          <a:solidFill>
+            <a:srgbClr val="C12026"/>
+          </a:solidFill>
+          <a:ln>
+            <a:noFill/>
+          </a:ln>
+          <a:effectLst/>
+        </p:spPr>
+        <p:style>
+          <a:lnRef idx="1">
+            <a:schemeClr val="accent1"/>
+          </a:lnRef>
+          <a:fillRef idx="3">
+            <a:schemeClr val="accent1"/>
+          </a:fillRef>
+          <a:effectRef idx="2">
+            <a:schemeClr val="accent1"/>
+          </a:effectRef>
+          <a:fontRef idx="minor">
+            <a:schemeClr val="lt1"/>
+          </a:fontRef>
+        </p:style>
+        <p:txBody>
+          <a:bodyPr rtlCol="0" anchor="ctr"/>
+          <a:lstStyle/>
+          <a:p>
+            <a:pPr algn="ctr"/>
           </a:p>
         </p:txBody>
       </p:sp>
@@ -9335,32 +12349,200 @@
         </p:nvSpPr>
         <p:spPr>
           <a:xfrm>
-            <a:off x="7205535" y="1247553"/>
-            <a:ext cx="4405560" cy="4880100"/>
+            <a:off x="7205535" y="1854753"/>
+            <a:ext cx="4405560" cy="4272900"/>
           </a:xfrm>
         </p:spPr>
         <p:txBody>
-          <a:bodyPr wrap="square"/>
+          <a:bodyPr wrap="square">
+            <a:normAutofit/>
+          </a:bodyPr>
           <a:lstStyle/>
           <a:p>
-            <a:pPr/>
-            <a:r>
-              <a:rPr b="1" sz="1600"/>
-              <a:t>市場整體（各期）呈現明顯的業者集中態勢</a:t>
+            <a:pPr>
+              <a:spcAft>
+                <a:spcPts val="800"/>
+              </a:spcAft>
+            </a:pPr>
+            <a:r>
+              <a:rPr sz="1100" b="1">
+                <a:solidFill>
+                  <a:srgbClr val="C12026"/>
+                </a:solidFill>
+                <a:latin typeface="微軟正黑體"/>
+                <a:ea typeface="微軟正黑體"/>
+                <a:cs typeface="微軟正黑體"/>
+              </a:rPr>
+              <a:t>▸ </a:t>
+            </a:r>
+            <a:r>
+              <a:rPr sz="1100" b="0">
+                <a:solidFill>
+                  <a:srgbClr val="4D4D4D"/>
+                </a:solidFill>
+                <a:latin typeface="微軟正黑體"/>
+                <a:ea typeface="微軟正黑體"/>
+                <a:cs typeface="微軟正黑體"/>
+              </a:rPr>
+              <a:t>領先者 </a:t>
+            </a:r>
+            <a:r>
+              <a:rPr sz="1100" b="1">
+                <a:solidFill>
+                  <a:srgbClr val="1A1A1A"/>
+                </a:solidFill>
+                <a:highlight>
+                  <a:srgbClr val="FFFF00"/>
+                </a:highlight>
+                <a:latin typeface="微軟正黑體"/>
+                <a:ea typeface="微軟正黑體"/>
+                <a:cs typeface="微軟正黑體"/>
+              </a:rPr>
+              <a:t>11401</a:t>
+            </a:r>
+            <a:r>
+              <a:rPr sz="1100" b="0">
+                <a:solidFill>
+                  <a:srgbClr val="4D4D4D"/>
+                </a:solidFill>
+                <a:latin typeface="微軟正黑體"/>
+                <a:ea typeface="微軟正黑體"/>
+                <a:cs typeface="微軟正黑體"/>
+              </a:rPr>
+              <a:t> 達 </a:t>
+            </a:r>
+            <a:r>
+              <a:rPr sz="1100" b="1">
+                <a:solidFill>
+                  <a:srgbClr val="1A1A1A"/>
+                </a:solidFill>
+                <a:highlight>
+                  <a:srgbClr val="FFFF00"/>
+                </a:highlight>
+                <a:latin typeface="微軟正黑體"/>
+                <a:ea typeface="微軟正黑體"/>
+                <a:cs typeface="微軟正黑體"/>
+              </a:rPr>
+              <a:t>654,750</a:t>
+            </a:r>
+            <a:r>
+              <a:rPr sz="1100" b="0">
+                <a:solidFill>
+                  <a:srgbClr val="4D4D4D"/>
+                </a:solidFill>
+                <a:latin typeface="微軟正黑體"/>
+                <a:ea typeface="微軟正黑體"/>
+                <a:cs typeface="微軟正黑體"/>
+              </a:rPr>
+              <a:t>，明顯拉開與其餘業者的距離，反映規模效應仍在累積</a:t>
             </a:r>
           </a:p>
           <a:p>
-            <a:pPr lvl="1"/>
-            <a:r>
-              <a:rPr sz="1200"/>
-              <a:t>領先者 11401 達 654,750</a:t>
+            <a:pPr>
+              <a:spcAft>
+                <a:spcPts val="800"/>
+              </a:spcAft>
+            </a:pPr>
+            <a:r>
+              <a:rPr sz="1100" b="1">
+                <a:solidFill>
+                  <a:srgbClr val="C12026"/>
+                </a:solidFill>
+                <a:latin typeface="微軟正黑體"/>
+                <a:ea typeface="微軟正黑體"/>
+                <a:cs typeface="微軟正黑體"/>
+              </a:rPr>
+              <a:t>▸ </a:t>
+            </a:r>
+            <a:r>
+              <a:rPr sz="1100" b="0">
+                <a:solidFill>
+                  <a:srgbClr val="4D4D4D"/>
+                </a:solidFill>
+                <a:latin typeface="微軟正黑體"/>
+                <a:ea typeface="微軟正黑體"/>
+                <a:cs typeface="微軟正黑體"/>
+              </a:rPr>
+              <a:t>末位業者僅 </a:t>
+            </a:r>
+            <a:r>
+              <a:rPr sz="1100" b="1">
+                <a:solidFill>
+                  <a:srgbClr val="1A1A1A"/>
+                </a:solidFill>
+                <a:highlight>
+                  <a:srgbClr val="FFFF00"/>
+                </a:highlight>
+                <a:latin typeface="微軟正黑體"/>
+                <a:ea typeface="微軟正黑體"/>
+                <a:cs typeface="微軟正黑體"/>
+              </a:rPr>
+              <a:t>572,496</a:t>
+            </a:r>
+            <a:r>
+              <a:rPr sz="1100" b="0">
+                <a:solidFill>
+                  <a:srgbClr val="4D4D4D"/>
+                </a:solidFill>
+                <a:latin typeface="微軟正黑體"/>
+                <a:ea typeface="微軟正黑體"/>
+                <a:cs typeface="微軟正黑體"/>
+              </a:rPr>
+              <a:t>，與領先者之間的落差顯示中小型業者在此指標上缺乏可持續的規模優勢</a:t>
             </a:r>
           </a:p>
           <a:p>
-            <a:pPr lvl="1"/>
-            <a:r>
-              <a:rPr sz="1200"/>
-              <a:t>末位者僅 572,496</a:t>
+            <a:pPr>
+              <a:spcAft>
+                <a:spcPts val="800"/>
+              </a:spcAft>
+            </a:pPr>
+            <a:r>
+              <a:rPr sz="1100" b="1">
+                <a:solidFill>
+                  <a:srgbClr val="C12026"/>
+                </a:solidFill>
+                <a:latin typeface="微軟正黑體"/>
+                <a:ea typeface="微軟正黑體"/>
+                <a:cs typeface="微軟正黑體"/>
+              </a:rPr>
+              <a:t>▸ </a:t>
+            </a:r>
+            <a:r>
+              <a:rPr sz="1100" b="0">
+                <a:solidFill>
+                  <a:srgbClr val="4D4D4D"/>
+                </a:solidFill>
+                <a:latin typeface="微軟正黑體"/>
+                <a:ea typeface="微軟正黑體"/>
+                <a:cs typeface="微軟正黑體"/>
+              </a:rPr>
+              <a:t>全體平均為 </a:t>
+            </a:r>
+            <a:r>
+              <a:rPr sz="1100" b="1">
+                <a:solidFill>
+                  <a:srgbClr val="1A1A1A"/>
+                </a:solidFill>
+                <a:highlight>
+                  <a:srgbClr val="FFFF00"/>
+                </a:highlight>
+                <a:latin typeface="微軟正黑體"/>
+                <a:ea typeface="微軟正黑體"/>
+                <a:cs typeface="微軟正黑體"/>
+              </a:rPr>
+              <a:t>617,209.9</a:t>
+            </a:r>
+            <a:r>
+              <a:rPr sz="1100" b="0">
+                <a:solidFill>
+                  <a:srgbClr val="4D4D4D"/>
+                </a:solidFill>
+                <a:latin typeface="微軟正黑體"/>
+                <a:ea typeface="微軟正黑體"/>
+                <a:cs typeface="微軟正黑體"/>
+              </a:rPr>
+              <a:t>，位於平均之下的業者需重新檢視資源配置是否與市場競爭強度相稱</a:t>
             </a:r>
           </a:p>
         </p:txBody>
@@ -9380,23 +12562,142 @@
           <a:bodyPr/>
           <a:lstStyle/>
           <a:p>
-            <a:r>
+            <a:pPr algn="l"/>
+            <a:r>
+              <a:rPr sz="2200" b="0">
+                <a:solidFill>
+                  <a:srgbClr val="1A1A1A"/>
+                </a:solidFill>
+                <a:latin typeface="微軟正黑體"/>
+                <a:ea typeface="微軟正黑體"/>
+                <a:cs typeface="微軟正黑體"/>
+              </a:rPr>
               <a:t>市場規模趨勢</a:t>
+            </a:r>
+          </a:p>
+        </p:txBody>
+      </p:sp>
+      <p:sp>
+        <p:nvSpPr>
+          <p:cNvPr id="4" name="Rectangle 3"/>
+          <p:cNvSpPr/>
+          <p:nvPr/>
+        </p:nvSpPr>
+        <p:spPr>
+          <a:xfrm>
+            <a:off x="368595" y="1247553"/>
+            <a:ext cx="57150" cy="457200"/>
+          </a:xfrm>
+          <a:prstGeom prst="rect">
+            <a:avLst/>
+          </a:prstGeom>
+          <a:solidFill>
+            <a:srgbClr val="FFC000"/>
+          </a:solidFill>
+          <a:ln>
+            <a:noFill/>
+          </a:ln>
+          <a:effectLst/>
+        </p:spPr>
+        <p:style>
+          <a:lnRef idx="1">
+            <a:schemeClr val="accent1"/>
+          </a:lnRef>
+          <a:fillRef idx="3">
+            <a:schemeClr val="accent1"/>
+          </a:fillRef>
+          <a:effectRef idx="2">
+            <a:schemeClr val="accent1"/>
+          </a:effectRef>
+          <a:fontRef idx="minor">
+            <a:schemeClr val="lt1"/>
+          </a:fontRef>
+        </p:style>
+        <p:txBody>
+          <a:bodyPr rtlCol="0" anchor="ctr"/>
+          <a:lstStyle/>
+          <a:p>
+            <a:pPr algn="ctr"/>
+          </a:p>
+        </p:txBody>
+      </p:sp>
+      <p:sp>
+        <p:nvSpPr>
+          <p:cNvPr id="5" name="Rectangle 4"/>
+          <p:cNvSpPr/>
+          <p:nvPr/>
+        </p:nvSpPr>
+        <p:spPr>
+          <a:xfrm>
+            <a:off x="425745" y="1247553"/>
+            <a:ext cx="11185350" cy="457200"/>
+          </a:xfrm>
+          <a:prstGeom prst="rect">
+            <a:avLst/>
+          </a:prstGeom>
+          <a:solidFill>
+            <a:srgbClr val="FFF8D6"/>
+          </a:solidFill>
+          <a:ln>
+            <a:noFill/>
+          </a:ln>
+          <a:effectLst/>
+        </p:spPr>
+        <p:style>
+          <a:lnRef idx="1">
+            <a:schemeClr val="accent1"/>
+          </a:lnRef>
+          <a:fillRef idx="3">
+            <a:schemeClr val="accent1"/>
+          </a:fillRef>
+          <a:effectRef idx="2">
+            <a:schemeClr val="accent1"/>
+          </a:effectRef>
+          <a:fontRef idx="minor">
+            <a:schemeClr val="lt1"/>
+          </a:fontRef>
+        </p:style>
+        <p:txBody>
+          <a:bodyPr rtlCol="0" anchor="ctr" wrap="square" lIns="175260"/>
+          <a:lstStyle/>
+          <a:p>
+            <a:pPr algn="l"/>
+            <a:r>
+              <a:rPr sz="1300" b="1">
+                <a:solidFill>
+                  <a:srgbClr val="C12026"/>
+                </a:solidFill>
+                <a:latin typeface="微軟正黑體"/>
+                <a:ea typeface="微軟正黑體"/>
+                <a:cs typeface="微軟正黑體"/>
+              </a:rPr>
+              <a:t>◆ </a:t>
+            </a:r>
+            <a:r>
+              <a:rPr sz="1300" b="1">
+                <a:solidFill>
+                  <a:srgbClr val="1A1A1A"/>
+                </a:solidFill>
+                <a:latin typeface="微軟正黑體"/>
+                <a:ea typeface="微軟正黑體"/>
+                <a:cs typeface="微軟正黑體"/>
+              </a:rPr>
+              <a:t>市場整體（各期）呈現明顯的業者集中態勢，規模差距短期內難以收斂</a:t>
             </a:r>
           </a:p>
         </p:txBody>
       </p:sp>
       <p:graphicFrame>
         <p:nvGraphicFramePr>
-          <p:cNvPr id="4" name="Chart 3"/>
+          <p:cNvPr id="6" name="Chart 5"/>
           <p:cNvGraphicFramePr>
             <a:graphicFrameLocks noGrp="1"/>
           </p:cNvGraphicFramePr>
           <p:nvPr/>
         </p:nvGraphicFramePr>
         <p:xfrm>
-          <a:off x="368595" y="1247553"/>
-          <a:ext cx="6608340" cy="4880100"/>
+          <a:off x="368595" y="1854753"/>
+          <a:ext cx="6608340" cy="4272900"/>
         </p:xfrm>
         <a:graphic>
           <a:graphicData uri="http://schemas.openxmlformats.org/drawingml/2006/chart">
@@ -9404,6 +12705,42 @@
           </a:graphicData>
         </a:graphic>
       </p:graphicFrame>
+      <p:sp>
+        <p:nvSpPr>
+          <p:cNvPr id="7" name="TextBox 6"/>
+          <p:cNvSpPr txBox="1"/>
+          <p:nvPr/>
+        </p:nvSpPr>
+        <p:spPr>
+          <a:xfrm>
+            <a:off x="368595" y="6150000"/>
+            <a:ext cx="11242500" cy="250000"/>
+          </a:xfrm>
+          <a:prstGeom prst="rect">
+            <a:avLst/>
+          </a:prstGeom>
+          <a:noFill/>
+        </p:spPr>
+        <p:txBody>
+          <a:bodyPr wrap="none">
+            <a:spAutoFit/>
+          </a:bodyPr>
+          <a:lstStyle/>
+          <a:p>
+            <a:r>
+              <a:rPr sz="1000" b="0">
+                <a:solidFill>
+                  <a:srgbClr val="666666"/>
+                </a:solidFill>
+                <a:latin typeface="微軟正黑體"/>
+                <a:ea typeface="微軟正黑體"/>
+                <a:cs typeface="微軟正黑體"/>
+              </a:rPr>
+              <a:t>可點選圖表右鍵「編輯資料」查看原始 EXCEL 資料表</a:t>
+            </a:r>
+          </a:p>
+        </p:txBody>
+      </p:sp>
     </p:spTree>
   </p:cSld>
   <p:clrMapOvr>
@@ -9434,32 +12771,200 @@
         </p:nvSpPr>
         <p:spPr>
           <a:xfrm>
-            <a:off x="7205535" y="1247553"/>
-            <a:ext cx="4405560" cy="4880100"/>
+            <a:off x="7205535" y="1854753"/>
+            <a:ext cx="4405560" cy="4272900"/>
           </a:xfrm>
         </p:spPr>
         <p:txBody>
-          <a:bodyPr wrap="square"/>
+          <a:bodyPr wrap="square">
+            <a:normAutofit/>
+          </a:bodyPr>
           <a:lstStyle/>
           <a:p>
-            <a:pPr/>
-            <a:r>
-              <a:rPr b="1" sz="1600"/>
-              <a:t>市場整體（各期） 期間成長率呈現明顯的業者集中態勢</a:t>
+            <a:pPr>
+              <a:spcAft>
+                <a:spcPts val="800"/>
+              </a:spcAft>
+            </a:pPr>
+            <a:r>
+              <a:rPr sz="1100" b="1">
+                <a:solidFill>
+                  <a:srgbClr val="C12026"/>
+                </a:solidFill>
+                <a:latin typeface="微軟正黑體"/>
+                <a:ea typeface="微軟正黑體"/>
+                <a:cs typeface="微軟正黑體"/>
+              </a:rPr>
+              <a:t>▸ </a:t>
+            </a:r>
+            <a:r>
+              <a:rPr sz="1100" b="0">
+                <a:solidFill>
+                  <a:srgbClr val="4D4D4D"/>
+                </a:solidFill>
+                <a:latin typeface="微軟正黑體"/>
+                <a:ea typeface="微軟正黑體"/>
+                <a:cs typeface="微軟正黑體"/>
+              </a:rPr>
+              <a:t>領先者 </a:t>
+            </a:r>
+            <a:r>
+              <a:rPr sz="1100" b="1">
+                <a:solidFill>
+                  <a:srgbClr val="1A1A1A"/>
+                </a:solidFill>
+                <a:highlight>
+                  <a:srgbClr val="FFFF00"/>
+                </a:highlight>
+                <a:latin typeface="微軟正黑體"/>
+                <a:ea typeface="微軟正黑體"/>
+                <a:cs typeface="微軟正黑體"/>
+              </a:rPr>
+              <a:t>11409</a:t>
+            </a:r>
+            <a:r>
+              <a:rPr sz="1100" b="0">
+                <a:solidFill>
+                  <a:srgbClr val="4D4D4D"/>
+                </a:solidFill>
+                <a:latin typeface="微軟正黑體"/>
+                <a:ea typeface="微軟正黑體"/>
+                <a:cs typeface="微軟正黑體"/>
+              </a:rPr>
+              <a:t> 達 </a:t>
+            </a:r>
+            <a:r>
+              <a:rPr sz="1100" b="1">
+                <a:solidFill>
+                  <a:srgbClr val="1A1A1A"/>
+                </a:solidFill>
+                <a:highlight>
+                  <a:srgbClr val="FFFF00"/>
+                </a:highlight>
+                <a:latin typeface="微軟正黑體"/>
+                <a:ea typeface="微軟正黑體"/>
+                <a:cs typeface="微軟正黑體"/>
+              </a:rPr>
+              <a:t>10.5%</a:t>
+            </a:r>
+            <a:r>
+              <a:rPr sz="1100" b="0">
+                <a:solidFill>
+                  <a:srgbClr val="4D4D4D"/>
+                </a:solidFill>
+                <a:latin typeface="微軟正黑體"/>
+                <a:ea typeface="微軟正黑體"/>
+                <a:cs typeface="微軟正黑體"/>
+              </a:rPr>
+              <a:t>，明顯拉開與其餘業者的距離，反映規模效應仍在累積</a:t>
             </a:r>
           </a:p>
           <a:p>
-            <a:pPr lvl="1"/>
-            <a:r>
-              <a:rPr sz="1200"/>
-              <a:t>領先者 11409 達 10.5%</a:t>
+            <a:pPr>
+              <a:spcAft>
+                <a:spcPts val="800"/>
+              </a:spcAft>
+            </a:pPr>
+            <a:r>
+              <a:rPr sz="1100" b="1">
+                <a:solidFill>
+                  <a:srgbClr val="C12026"/>
+                </a:solidFill>
+                <a:latin typeface="微軟正黑體"/>
+                <a:ea typeface="微軟正黑體"/>
+                <a:cs typeface="微軟正黑體"/>
+              </a:rPr>
+              <a:t>▸ </a:t>
+            </a:r>
+            <a:r>
+              <a:rPr sz="1100" b="0">
+                <a:solidFill>
+                  <a:srgbClr val="4D4D4D"/>
+                </a:solidFill>
+                <a:latin typeface="微軟正黑體"/>
+                <a:ea typeface="微軟正黑體"/>
+                <a:cs typeface="微軟正黑體"/>
+              </a:rPr>
+              <a:t>末位業者僅 </a:t>
+            </a:r>
+            <a:r>
+              <a:rPr sz="1100" b="1">
+                <a:solidFill>
+                  <a:srgbClr val="1A1A1A"/>
+                </a:solidFill>
+                <a:highlight>
+                  <a:srgbClr val="FFFF00"/>
+                </a:highlight>
+                <a:latin typeface="微軟正黑體"/>
+                <a:ea typeface="微軟正黑體"/>
+                <a:cs typeface="微軟正黑體"/>
+              </a:rPr>
+              <a:t>-6.7%</a:t>
+            </a:r>
+            <a:r>
+              <a:rPr sz="1100" b="0">
+                <a:solidFill>
+                  <a:srgbClr val="4D4D4D"/>
+                </a:solidFill>
+                <a:latin typeface="微軟正黑體"/>
+                <a:ea typeface="微軟正黑體"/>
+                <a:cs typeface="微軟正黑體"/>
+              </a:rPr>
+              <a:t>，與領先者之間的落差顯示中小型業者在此指標上缺乏可持續的規模優勢</a:t>
             </a:r>
           </a:p>
           <a:p>
-            <a:pPr lvl="1"/>
-            <a:r>
-              <a:rPr sz="1200"/>
-              <a:t>末位者僅 -6.7%</a:t>
+            <a:pPr>
+              <a:spcAft>
+                <a:spcPts val="800"/>
+              </a:spcAft>
+            </a:pPr>
+            <a:r>
+              <a:rPr sz="1100" b="1">
+                <a:solidFill>
+                  <a:srgbClr val="C12026"/>
+                </a:solidFill>
+                <a:latin typeface="微軟正黑體"/>
+                <a:ea typeface="微軟正黑體"/>
+                <a:cs typeface="微軟正黑體"/>
+              </a:rPr>
+              <a:t>▸ </a:t>
+            </a:r>
+            <a:r>
+              <a:rPr sz="1100" b="0">
+                <a:solidFill>
+                  <a:srgbClr val="4D4D4D"/>
+                </a:solidFill>
+                <a:latin typeface="微軟正黑體"/>
+                <a:ea typeface="微軟正黑體"/>
+                <a:cs typeface="微軟正黑體"/>
+              </a:rPr>
+              <a:t>全體平均為 </a:t>
+            </a:r>
+            <a:r>
+              <a:rPr sz="1100" b="1">
+                <a:solidFill>
+                  <a:srgbClr val="1A1A1A"/>
+                </a:solidFill>
+                <a:highlight>
+                  <a:srgbClr val="FFFF00"/>
+                </a:highlight>
+                <a:latin typeface="微軟正黑體"/>
+                <a:ea typeface="微軟正黑體"/>
+                <a:cs typeface="微軟正黑體"/>
+              </a:rPr>
+              <a:t>0.0%</a:t>
+            </a:r>
+            <a:r>
+              <a:rPr sz="1100" b="0">
+                <a:solidFill>
+                  <a:srgbClr val="4D4D4D"/>
+                </a:solidFill>
+                <a:latin typeface="微軟正黑體"/>
+                <a:ea typeface="微軟正黑體"/>
+                <a:cs typeface="微軟正黑體"/>
+              </a:rPr>
+              <a:t>，位於平均之下的業者需重新檢視資源配置是否與市場競爭強度相稱</a:t>
             </a:r>
           </a:p>
         </p:txBody>
@@ -9479,23 +12984,142 @@
           <a:bodyPr/>
           <a:lstStyle/>
           <a:p>
-            <a:r>
+            <a:pPr algn="l"/>
+            <a:r>
+              <a:rPr sz="2200" b="0">
+                <a:solidFill>
+                  <a:srgbClr val="1A1A1A"/>
+                </a:solidFill>
+                <a:latin typeface="微軟正黑體"/>
+                <a:ea typeface="微軟正黑體"/>
+                <a:cs typeface="微軟正黑體"/>
+              </a:rPr>
               <a:t>市場動能檢視</a:t>
+            </a:r>
+          </a:p>
+        </p:txBody>
+      </p:sp>
+      <p:sp>
+        <p:nvSpPr>
+          <p:cNvPr id="4" name="Rectangle 3"/>
+          <p:cNvSpPr/>
+          <p:nvPr/>
+        </p:nvSpPr>
+        <p:spPr>
+          <a:xfrm>
+            <a:off x="368595" y="1247553"/>
+            <a:ext cx="57150" cy="457200"/>
+          </a:xfrm>
+          <a:prstGeom prst="rect">
+            <a:avLst/>
+          </a:prstGeom>
+          <a:solidFill>
+            <a:srgbClr val="FFC000"/>
+          </a:solidFill>
+          <a:ln>
+            <a:noFill/>
+          </a:ln>
+          <a:effectLst/>
+        </p:spPr>
+        <p:style>
+          <a:lnRef idx="1">
+            <a:schemeClr val="accent1"/>
+          </a:lnRef>
+          <a:fillRef idx="3">
+            <a:schemeClr val="accent1"/>
+          </a:fillRef>
+          <a:effectRef idx="2">
+            <a:schemeClr val="accent1"/>
+          </a:effectRef>
+          <a:fontRef idx="minor">
+            <a:schemeClr val="lt1"/>
+          </a:fontRef>
+        </p:style>
+        <p:txBody>
+          <a:bodyPr rtlCol="0" anchor="ctr"/>
+          <a:lstStyle/>
+          <a:p>
+            <a:pPr algn="ctr"/>
+          </a:p>
+        </p:txBody>
+      </p:sp>
+      <p:sp>
+        <p:nvSpPr>
+          <p:cNvPr id="5" name="Rectangle 4"/>
+          <p:cNvSpPr/>
+          <p:nvPr/>
+        </p:nvSpPr>
+        <p:spPr>
+          <a:xfrm>
+            <a:off x="425745" y="1247553"/>
+            <a:ext cx="11185350" cy="457200"/>
+          </a:xfrm>
+          <a:prstGeom prst="rect">
+            <a:avLst/>
+          </a:prstGeom>
+          <a:solidFill>
+            <a:srgbClr val="FFF8D6"/>
+          </a:solidFill>
+          <a:ln>
+            <a:noFill/>
+          </a:ln>
+          <a:effectLst/>
+        </p:spPr>
+        <p:style>
+          <a:lnRef idx="1">
+            <a:schemeClr val="accent1"/>
+          </a:lnRef>
+          <a:fillRef idx="3">
+            <a:schemeClr val="accent1"/>
+          </a:fillRef>
+          <a:effectRef idx="2">
+            <a:schemeClr val="accent1"/>
+          </a:effectRef>
+          <a:fontRef idx="minor">
+            <a:schemeClr val="lt1"/>
+          </a:fontRef>
+        </p:style>
+        <p:txBody>
+          <a:bodyPr rtlCol="0" anchor="ctr" wrap="square" lIns="175260"/>
+          <a:lstStyle/>
+          <a:p>
+            <a:pPr algn="l"/>
+            <a:r>
+              <a:rPr sz="1300" b="1">
+                <a:solidFill>
+                  <a:srgbClr val="C12026"/>
+                </a:solidFill>
+                <a:latin typeface="微軟正黑體"/>
+                <a:ea typeface="微軟正黑體"/>
+                <a:cs typeface="微軟正黑體"/>
+              </a:rPr>
+              <a:t>◆ </a:t>
+            </a:r>
+            <a:r>
+              <a:rPr sz="1300" b="1">
+                <a:solidFill>
+                  <a:srgbClr val="1A1A1A"/>
+                </a:solidFill>
+                <a:latin typeface="微軟正黑體"/>
+                <a:ea typeface="微軟正黑體"/>
+                <a:cs typeface="微軟正黑體"/>
+              </a:rPr>
+              <a:t>市場整體（各期） 期間成長率呈現明顯的業者集中態勢，規模差距短期內難以收斂</a:t>
             </a:r>
           </a:p>
         </p:txBody>
       </p:sp>
       <p:graphicFrame>
         <p:nvGraphicFramePr>
-          <p:cNvPr id="4" name="Chart 3"/>
+          <p:cNvPr id="6" name="Chart 5"/>
           <p:cNvGraphicFramePr>
             <a:graphicFrameLocks noGrp="1"/>
           </p:cNvGraphicFramePr>
           <p:nvPr/>
         </p:nvGraphicFramePr>
         <p:xfrm>
-          <a:off x="368595" y="1247553"/>
-          <a:ext cx="6608340" cy="4880100"/>
+          <a:off x="368595" y="1854753"/>
+          <a:ext cx="6608340" cy="4272900"/>
         </p:xfrm>
         <a:graphic>
           <a:graphicData uri="http://schemas.openxmlformats.org/drawingml/2006/chart">
@@ -9503,6 +13127,42 @@
           </a:graphicData>
         </a:graphic>
       </p:graphicFrame>
+      <p:sp>
+        <p:nvSpPr>
+          <p:cNvPr id="7" name="TextBox 6"/>
+          <p:cNvSpPr txBox="1"/>
+          <p:nvPr/>
+        </p:nvSpPr>
+        <p:spPr>
+          <a:xfrm>
+            <a:off x="368595" y="6150000"/>
+            <a:ext cx="11242500" cy="250000"/>
+          </a:xfrm>
+          <a:prstGeom prst="rect">
+            <a:avLst/>
+          </a:prstGeom>
+          <a:noFill/>
+        </p:spPr>
+        <p:txBody>
+          <a:bodyPr wrap="none">
+            <a:spAutoFit/>
+          </a:bodyPr>
+          <a:lstStyle/>
+          <a:p>
+            <a:r>
+              <a:rPr sz="1000" b="0">
+                <a:solidFill>
+                  <a:srgbClr val="666666"/>
+                </a:solidFill>
+                <a:latin typeface="微軟正黑體"/>
+                <a:ea typeface="微軟正黑體"/>
+                <a:cs typeface="微軟正黑體"/>
+              </a:rPr>
+              <a:t>可點選圖表右鍵「編輯資料」查看原始 EXCEL 資料表</a:t>
+            </a:r>
+          </a:p>
+        </p:txBody>
+      </p:sp>
     </p:spTree>
   </p:cSld>
   <p:clrMapOvr>
@@ -9537,8 +13197,73 @@
           <a:lstStyle/>
           <a:p>
             <a:r>
+              <a:rPr sz="1400" b="0">
+                <a:solidFill>
+                  <a:srgbClr val="C12026"/>
+                </a:solidFill>
+                <a:latin typeface="微軟正黑體"/>
+                <a:ea typeface="微軟正黑體"/>
+                <a:cs typeface="微軟正黑體"/>
+              </a:rPr>
+              <a:t>CHAPTER 03</a:t>
+            </a:r>
+          </a:p>
+          <a:p>
+            <a:r>
+              <a:rPr sz="3200" b="1">
+                <a:solidFill>
+                  <a:srgbClr val="4D4D4D"/>
+                </a:solidFill>
+                <a:latin typeface="微軟正黑體"/>
+                <a:ea typeface="微軟正黑體"/>
+                <a:cs typeface="微軟正黑體"/>
+              </a:rPr>
               <a:t>同業成長及競爭分析</a:t>
             </a:r>
+          </a:p>
+        </p:txBody>
+      </p:sp>
+      <p:sp>
+        <p:nvSpPr>
+          <p:cNvPr id="3" name="Rectangle 2"/>
+          <p:cNvSpPr/>
+          <p:nvPr/>
+        </p:nvSpPr>
+        <p:spPr>
+          <a:xfrm>
+            <a:off x="831851" y="5737075"/>
+            <a:ext cx="1905000" cy="28575"/>
+          </a:xfrm>
+          <a:prstGeom prst="rect">
+            <a:avLst/>
+          </a:prstGeom>
+          <a:solidFill>
+            <a:srgbClr val="C12026"/>
+          </a:solidFill>
+          <a:ln>
+            <a:noFill/>
+          </a:ln>
+          <a:effectLst/>
+        </p:spPr>
+        <p:style>
+          <a:lnRef idx="1">
+            <a:schemeClr val="accent1"/>
+          </a:lnRef>
+          <a:fillRef idx="3">
+            <a:schemeClr val="accent1"/>
+          </a:fillRef>
+          <a:effectRef idx="2">
+            <a:schemeClr val="accent1"/>
+          </a:effectRef>
+          <a:fontRef idx="minor">
+            <a:schemeClr val="lt1"/>
+          </a:fontRef>
+        </p:style>
+        <p:txBody>
+          <a:bodyPr rtlCol="0" anchor="ctr"/>
+          <a:lstStyle/>
+          <a:p>
+            <a:pPr algn="ctr"/>
           </a:p>
         </p:txBody>
       </p:sp>
@@ -9572,32 +13297,200 @@
         </p:nvSpPr>
         <p:spPr>
           <a:xfrm>
-            <a:off x="7205535" y="1247553"/>
-            <a:ext cx="4405560" cy="4880100"/>
+            <a:off x="7205535" y="1854753"/>
+            <a:ext cx="4405560" cy="4272900"/>
           </a:xfrm>
         </p:spPr>
         <p:txBody>
-          <a:bodyPr wrap="square"/>
+          <a:bodyPr wrap="square">
+            <a:normAutofit/>
+          </a:bodyPr>
           <a:lstStyle/>
           <a:p>
-            <a:pPr/>
-            <a:r>
-              <a:rPr b="1" sz="1600"/>
-              <a:t>循環信用餘額 占比 Top 10呈現明顯的業者集中態勢</a:t>
+            <a:pPr>
+              <a:spcAft>
+                <a:spcPts val="800"/>
+              </a:spcAft>
+            </a:pPr>
+            <a:r>
+              <a:rPr sz="1100" b="1">
+                <a:solidFill>
+                  <a:srgbClr val="C12026"/>
+                </a:solidFill>
+                <a:latin typeface="微軟正黑體"/>
+                <a:ea typeface="微軟正黑體"/>
+                <a:cs typeface="微軟正黑體"/>
+              </a:rPr>
+              <a:t>▸ </a:t>
+            </a:r>
+            <a:r>
+              <a:rPr sz="1100" b="0">
+                <a:solidFill>
+                  <a:srgbClr val="4D4D4D"/>
+                </a:solidFill>
+                <a:latin typeface="微軟正黑體"/>
+                <a:ea typeface="微軟正黑體"/>
+                <a:cs typeface="微軟正黑體"/>
+              </a:rPr>
+              <a:t>領先者 </a:t>
+            </a:r>
+            <a:r>
+              <a:rPr sz="1100" b="1">
+                <a:solidFill>
+                  <a:srgbClr val="1A1A1A"/>
+                </a:solidFill>
+                <a:highlight>
+                  <a:srgbClr val="FFFF00"/>
+                </a:highlight>
+                <a:latin typeface="微軟正黑體"/>
+                <a:ea typeface="微軟正黑體"/>
+                <a:cs typeface="微軟正黑體"/>
+              </a:rPr>
+              <a:t>國泰世華商業銀行</a:t>
+            </a:r>
+            <a:r>
+              <a:rPr sz="1100" b="0">
+                <a:solidFill>
+                  <a:srgbClr val="4D4D4D"/>
+                </a:solidFill>
+                <a:latin typeface="微軟正黑體"/>
+                <a:ea typeface="微軟正黑體"/>
+                <a:cs typeface="微軟正黑體"/>
+              </a:rPr>
+              <a:t> 達 </a:t>
+            </a:r>
+            <a:r>
+              <a:rPr sz="1100" b="1">
+                <a:solidFill>
+                  <a:srgbClr val="1A1A1A"/>
+                </a:solidFill>
+                <a:highlight>
+                  <a:srgbClr val="FFFF00"/>
+                </a:highlight>
+                <a:latin typeface="微軟正黑體"/>
+                <a:ea typeface="微軟正黑體"/>
+                <a:cs typeface="微軟正黑體"/>
+              </a:rPr>
+              <a:t>18.7%</a:t>
+            </a:r>
+            <a:r>
+              <a:rPr sz="1100" b="0">
+                <a:solidFill>
+                  <a:srgbClr val="4D4D4D"/>
+                </a:solidFill>
+                <a:latin typeface="微軟正黑體"/>
+                <a:ea typeface="微軟正黑體"/>
+                <a:cs typeface="微軟正黑體"/>
+              </a:rPr>
+              <a:t>，明顯拉開與其餘業者的距離，反映規模效應仍在累積</a:t>
             </a:r>
           </a:p>
           <a:p>
-            <a:pPr lvl="1"/>
-            <a:r>
-              <a:rPr sz="1200"/>
-              <a:t>領先者 國泰世華商業銀行 達 18.7%</a:t>
+            <a:pPr>
+              <a:spcAft>
+                <a:spcPts val="800"/>
+              </a:spcAft>
+            </a:pPr>
+            <a:r>
+              <a:rPr sz="1100" b="1">
+                <a:solidFill>
+                  <a:srgbClr val="C12026"/>
+                </a:solidFill>
+                <a:latin typeface="微軟正黑體"/>
+                <a:ea typeface="微軟正黑體"/>
+                <a:cs typeface="微軟正黑體"/>
+              </a:rPr>
+              <a:t>▸ </a:t>
+            </a:r>
+            <a:r>
+              <a:rPr sz="1100" b="0">
+                <a:solidFill>
+                  <a:srgbClr val="4D4D4D"/>
+                </a:solidFill>
+                <a:latin typeface="微軟正黑體"/>
+                <a:ea typeface="微軟正黑體"/>
+                <a:cs typeface="微軟正黑體"/>
+              </a:rPr>
+              <a:t>末位業者僅 </a:t>
+            </a:r>
+            <a:r>
+              <a:rPr sz="1100" b="1">
+                <a:solidFill>
+                  <a:srgbClr val="1A1A1A"/>
+                </a:solidFill>
+                <a:highlight>
+                  <a:srgbClr val="FFFF00"/>
+                </a:highlight>
+                <a:latin typeface="微軟正黑體"/>
+                <a:ea typeface="微軟正黑體"/>
+                <a:cs typeface="微軟正黑體"/>
+              </a:rPr>
+              <a:t>1.4%</a:t>
+            </a:r>
+            <a:r>
+              <a:rPr sz="1100" b="0">
+                <a:solidFill>
+                  <a:srgbClr val="4D4D4D"/>
+                </a:solidFill>
+                <a:latin typeface="微軟正黑體"/>
+                <a:ea typeface="微軟正黑體"/>
+                <a:cs typeface="微軟正黑體"/>
+              </a:rPr>
+              <a:t>，與領先者之間的落差顯示中小型業者在此指標上缺乏可持續的規模優勢</a:t>
             </a:r>
           </a:p>
           <a:p>
-            <a:pPr lvl="1"/>
-            <a:r>
-              <a:rPr sz="1200"/>
-              <a:t>末位者僅 1.4%</a:t>
+            <a:pPr>
+              <a:spcAft>
+                <a:spcPts val="800"/>
+              </a:spcAft>
+            </a:pPr>
+            <a:r>
+              <a:rPr sz="1100" b="1">
+                <a:solidFill>
+                  <a:srgbClr val="C12026"/>
+                </a:solidFill>
+                <a:latin typeface="微軟正黑體"/>
+                <a:ea typeface="微軟正黑體"/>
+                <a:cs typeface="微軟正黑體"/>
+              </a:rPr>
+              <a:t>▸ </a:t>
+            </a:r>
+            <a:r>
+              <a:rPr sz="1100" b="0">
+                <a:solidFill>
+                  <a:srgbClr val="4D4D4D"/>
+                </a:solidFill>
+                <a:latin typeface="微軟正黑體"/>
+                <a:ea typeface="微軟正黑體"/>
+                <a:cs typeface="微軟正黑體"/>
+              </a:rPr>
+              <a:t>全體平均為 </a:t>
+            </a:r>
+            <a:r>
+              <a:rPr sz="1100" b="1">
+                <a:solidFill>
+                  <a:srgbClr val="1A1A1A"/>
+                </a:solidFill>
+                <a:highlight>
+                  <a:srgbClr val="FFFF00"/>
+                </a:highlight>
+                <a:latin typeface="微軟正黑體"/>
+                <a:ea typeface="微軟正黑體"/>
+                <a:cs typeface="微軟正黑體"/>
+              </a:rPr>
+              <a:t>8.9%</a:t>
+            </a:r>
+            <a:r>
+              <a:rPr sz="1100" b="0">
+                <a:solidFill>
+                  <a:srgbClr val="4D4D4D"/>
+                </a:solidFill>
+                <a:latin typeface="微軟正黑體"/>
+                <a:ea typeface="微軟正黑體"/>
+                <a:cs typeface="微軟正黑體"/>
+              </a:rPr>
+              <a:t>，位於平均之下的業者需重新檢視資源配置是否與市場競爭強度相稱</a:t>
             </a:r>
           </a:p>
         </p:txBody>
@@ -9617,23 +13510,142 @@
           <a:bodyPr/>
           <a:lstStyle/>
           <a:p>
-            <a:r>
+            <a:pPr algn="l"/>
+            <a:r>
+              <a:rPr sz="2200" b="0">
+                <a:solidFill>
+                  <a:srgbClr val="1A1A1A"/>
+                </a:solidFill>
+                <a:latin typeface="微軟正黑體"/>
+                <a:ea typeface="微軟正黑體"/>
+                <a:cs typeface="微軟正黑體"/>
+              </a:rPr>
               <a:t>市占結構</a:t>
+            </a:r>
+          </a:p>
+        </p:txBody>
+      </p:sp>
+      <p:sp>
+        <p:nvSpPr>
+          <p:cNvPr id="4" name="Rectangle 3"/>
+          <p:cNvSpPr/>
+          <p:nvPr/>
+        </p:nvSpPr>
+        <p:spPr>
+          <a:xfrm>
+            <a:off x="368595" y="1247553"/>
+            <a:ext cx="57150" cy="457200"/>
+          </a:xfrm>
+          <a:prstGeom prst="rect">
+            <a:avLst/>
+          </a:prstGeom>
+          <a:solidFill>
+            <a:srgbClr val="FFC000"/>
+          </a:solidFill>
+          <a:ln>
+            <a:noFill/>
+          </a:ln>
+          <a:effectLst/>
+        </p:spPr>
+        <p:style>
+          <a:lnRef idx="1">
+            <a:schemeClr val="accent1"/>
+          </a:lnRef>
+          <a:fillRef idx="3">
+            <a:schemeClr val="accent1"/>
+          </a:fillRef>
+          <a:effectRef idx="2">
+            <a:schemeClr val="accent1"/>
+          </a:effectRef>
+          <a:fontRef idx="minor">
+            <a:schemeClr val="lt1"/>
+          </a:fontRef>
+        </p:style>
+        <p:txBody>
+          <a:bodyPr rtlCol="0" anchor="ctr"/>
+          <a:lstStyle/>
+          <a:p>
+            <a:pPr algn="ctr"/>
+          </a:p>
+        </p:txBody>
+      </p:sp>
+      <p:sp>
+        <p:nvSpPr>
+          <p:cNvPr id="5" name="Rectangle 4"/>
+          <p:cNvSpPr/>
+          <p:nvPr/>
+        </p:nvSpPr>
+        <p:spPr>
+          <a:xfrm>
+            <a:off x="425745" y="1247553"/>
+            <a:ext cx="11185350" cy="457200"/>
+          </a:xfrm>
+          <a:prstGeom prst="rect">
+            <a:avLst/>
+          </a:prstGeom>
+          <a:solidFill>
+            <a:srgbClr val="FFF8D6"/>
+          </a:solidFill>
+          <a:ln>
+            <a:noFill/>
+          </a:ln>
+          <a:effectLst/>
+        </p:spPr>
+        <p:style>
+          <a:lnRef idx="1">
+            <a:schemeClr val="accent1"/>
+          </a:lnRef>
+          <a:fillRef idx="3">
+            <a:schemeClr val="accent1"/>
+          </a:fillRef>
+          <a:effectRef idx="2">
+            <a:schemeClr val="accent1"/>
+          </a:effectRef>
+          <a:fontRef idx="minor">
+            <a:schemeClr val="lt1"/>
+          </a:fontRef>
+        </p:style>
+        <p:txBody>
+          <a:bodyPr rtlCol="0" anchor="ctr" wrap="square" lIns="175260"/>
+          <a:lstStyle/>
+          <a:p>
+            <a:pPr algn="l"/>
+            <a:r>
+              <a:rPr sz="1300" b="1">
+                <a:solidFill>
+                  <a:srgbClr val="C12026"/>
+                </a:solidFill>
+                <a:latin typeface="微軟正黑體"/>
+                <a:ea typeface="微軟正黑體"/>
+                <a:cs typeface="微軟正黑體"/>
+              </a:rPr>
+              <a:t>◆ </a:t>
+            </a:r>
+            <a:r>
+              <a:rPr sz="1300" b="1">
+                <a:solidFill>
+                  <a:srgbClr val="1A1A1A"/>
+                </a:solidFill>
+                <a:latin typeface="微軟正黑體"/>
+                <a:ea typeface="微軟正黑體"/>
+                <a:cs typeface="微軟正黑體"/>
+              </a:rPr>
+              <a:t>循環信用餘額 占比 Top 10呈現明顯的業者集中態勢，規模差距短期內難以收斂</a:t>
             </a:r>
           </a:p>
         </p:txBody>
       </p:sp>
       <p:graphicFrame>
         <p:nvGraphicFramePr>
-          <p:cNvPr id="4" name="Chart 3"/>
+          <p:cNvPr id="6" name="Chart 5"/>
           <p:cNvGraphicFramePr>
             <a:graphicFrameLocks noGrp="1"/>
           </p:cNvGraphicFramePr>
           <p:nvPr/>
         </p:nvGraphicFramePr>
         <p:xfrm>
-          <a:off x="368595" y="1247553"/>
-          <a:ext cx="6608340" cy="4880100"/>
+          <a:off x="368595" y="1854753"/>
+          <a:ext cx="6608340" cy="4272900"/>
         </p:xfrm>
         <a:graphic>
           <a:graphicData uri="http://schemas.openxmlformats.org/drawingml/2006/chart">
@@ -9641,6 +13653,42 @@
           </a:graphicData>
         </a:graphic>
       </p:graphicFrame>
+      <p:sp>
+        <p:nvSpPr>
+          <p:cNvPr id="7" name="TextBox 6"/>
+          <p:cNvSpPr txBox="1"/>
+          <p:nvPr/>
+        </p:nvSpPr>
+        <p:spPr>
+          <a:xfrm>
+            <a:off x="368595" y="6150000"/>
+            <a:ext cx="11242500" cy="250000"/>
+          </a:xfrm>
+          <a:prstGeom prst="rect">
+            <a:avLst/>
+          </a:prstGeom>
+          <a:noFill/>
+        </p:spPr>
+        <p:txBody>
+          <a:bodyPr wrap="none">
+            <a:spAutoFit/>
+          </a:bodyPr>
+          <a:lstStyle/>
+          <a:p>
+            <a:r>
+              <a:rPr sz="1000" b="0">
+                <a:solidFill>
+                  <a:srgbClr val="666666"/>
+                </a:solidFill>
+                <a:latin typeface="微軟正黑體"/>
+                <a:ea typeface="微軟正黑體"/>
+                <a:cs typeface="微軟正黑體"/>
+              </a:rPr>
+              <a:t>可點選圖表右鍵「編輯資料」查看原始 EXCEL 資料表</a:t>
+            </a:r>
+          </a:p>
+        </p:txBody>
+      </p:sp>
     </p:spTree>
   </p:cSld>
   <p:clrMapOvr>
